--- a/20260905/pde5_harness/sample_run/report/docs/poster_A0.pptx
+++ b/20260905/pde5_harness/sample_run/report/docs/poster_A0.pptx
@@ -3426,7 +3426,7 @@
         <p:spPr>
           <a:xfrm>
             <a:off x="1440000" y="6480000"/>
-            <a:ext cx="27396000" cy="720000"/>
+            <a:ext cx="27396000" cy="792000"/>
           </a:xfrm>
           <a:prstGeom prst="rect">
             <a:avLst/>
@@ -3445,7 +3445,7 @@
               </a:spcAft>
             </a:pPr>
             <a:r>
-              <a:rPr sz="2500" b="0">
+              <a:rPr sz="2900" b="1">
                 <a:solidFill>
                   <a:srgbClr val="1A1A1A"/>
                 </a:solidFill>
@@ -3473,7 +3473,7 @@
         <p:spPr>
           <a:xfrm>
             <a:off x="1080000" y="7632000"/>
-            <a:ext cx="28116000" cy="10198007"/>
+            <a:ext cx="28116000" cy="9926568"/>
           </a:xfrm>
           <a:prstGeom prst="rect">
             <a:avLst/>
@@ -3488,7 +3488,7 @@
         </p:nvSpPr>
         <p:spPr>
           <a:xfrm>
-            <a:off x="1080000" y="18082007"/>
+            <a:off x="1080000" y="17810568"/>
             <a:ext cx="8844000" cy="612000"/>
           </a:xfrm>
           <a:prstGeom prst="rect">
@@ -3532,7 +3532,7 @@
         </p:nvSpPr>
         <p:spPr>
           <a:xfrm>
-            <a:off x="1260000" y="18136007"/>
+            <a:off x="1260000" y="17864568"/>
             <a:ext cx="648000" cy="504000"/>
           </a:xfrm>
           <a:prstGeom prst="rect">
@@ -3571,7 +3571,7 @@
         </p:nvSpPr>
         <p:spPr>
           <a:xfrm>
-            <a:off x="2016000" y="18136007"/>
+            <a:off x="2016000" y="17864568"/>
             <a:ext cx="7764000" cy="504000"/>
           </a:xfrm>
           <a:prstGeom prst="rect">
@@ -3610,7 +3610,7 @@
         </p:nvSpPr>
         <p:spPr>
           <a:xfrm>
-            <a:off x="1080000" y="18910006"/>
+            <a:off x="1080000" y="18638568"/>
             <a:ext cx="8844000" cy="4320417"/>
           </a:xfrm>
           <a:prstGeom prst="rect">
@@ -3681,7 +3681,7 @@
         </p:nvSpPr>
         <p:spPr>
           <a:xfrm>
-            <a:off x="1080000" y="23446424"/>
+            <a:off x="1080000" y="23174985"/>
             <a:ext cx="8844000" cy="3517391"/>
           </a:xfrm>
           <a:prstGeom prst="roundRect">
@@ -3727,7 +3727,7 @@
         </p:nvSpPr>
         <p:spPr>
           <a:xfrm>
-            <a:off x="1296000" y="23662424"/>
+            <a:off x="1296000" y="23390985"/>
             <a:ext cx="8412000" cy="3085391"/>
           </a:xfrm>
           <a:prstGeom prst="rect">
@@ -3866,7 +3866,7 @@
         </p:nvSpPr>
         <p:spPr>
           <a:xfrm>
-            <a:off x="1080000" y="27179816"/>
+            <a:off x="1080000" y="26908377"/>
             <a:ext cx="8844000" cy="612000"/>
           </a:xfrm>
           <a:prstGeom prst="rect">
@@ -3910,7 +3910,7 @@
         </p:nvSpPr>
         <p:spPr>
           <a:xfrm>
-            <a:off x="1260000" y="27233816"/>
+            <a:off x="1260000" y="26962377"/>
             <a:ext cx="648000" cy="504000"/>
           </a:xfrm>
           <a:prstGeom prst="rect">
@@ -3949,7 +3949,7 @@
         </p:nvSpPr>
         <p:spPr>
           <a:xfrm>
-            <a:off x="2016000" y="27233816"/>
+            <a:off x="2016000" y="26962377"/>
             <a:ext cx="7764000" cy="504000"/>
           </a:xfrm>
           <a:prstGeom prst="rect">
@@ -3996,7 +3996,7 @@
         </p:blipFill>
         <p:spPr>
           <a:xfrm>
-            <a:off x="1080000" y="28007816"/>
+            <a:off x="1080000" y="27736377"/>
             <a:ext cx="8844000" cy="2767440"/>
           </a:xfrm>
           <a:prstGeom prst="rect">
@@ -4012,7 +4012,7 @@
         </p:nvSpPr>
         <p:spPr>
           <a:xfrm>
-            <a:off x="1080000" y="30955256"/>
+            <a:off x="1080000" y="30683817"/>
             <a:ext cx="8844000" cy="2427998"/>
           </a:xfrm>
           <a:prstGeom prst="rect">
@@ -4067,7 +4067,7 @@
         </p:nvSpPr>
         <p:spPr>
           <a:xfrm>
-            <a:off x="1080000" y="33599254"/>
+            <a:off x="1080000" y="33327815"/>
             <a:ext cx="8844000" cy="2446033"/>
           </a:xfrm>
           <a:prstGeom prst="rect">
@@ -4122,7 +4122,778 @@
         </p:nvSpPr>
         <p:spPr>
           <a:xfrm>
-            <a:off x="10715999" y="18082007"/>
+            <a:off x="1080000" y="35773849"/>
+            <a:ext cx="8844000" cy="612000"/>
+          </a:xfrm>
+          <a:prstGeom prst="rect">
+            <a:avLst/>
+          </a:prstGeom>
+          <a:solidFill>
+            <a:srgbClr val="D55E00"/>
+          </a:solidFill>
+          <a:ln>
+            <a:noFill/>
+          </a:ln>
+          <a:effectLst/>
+        </p:spPr>
+        <p:style>
+          <a:lnRef idx="1">
+            <a:schemeClr val="accent1"/>
+          </a:lnRef>
+          <a:fillRef idx="3">
+            <a:schemeClr val="accent1"/>
+          </a:fillRef>
+          <a:effectRef idx="2">
+            <a:schemeClr val="accent1"/>
+          </a:effectRef>
+          <a:fontRef idx="minor">
+            <a:schemeClr val="lt1"/>
+          </a:fontRef>
+        </p:style>
+        <p:txBody>
+          <a:bodyPr rtlCol="0" anchor="ctr"/>
+          <a:lstStyle/>
+          <a:p>
+            <a:pPr algn="ctr"/>
+          </a:p>
+        </p:txBody>
+      </p:sp>
+      <p:sp>
+        <p:nvSpPr>
+          <p:cNvPr id="25" name="TextBox 24"/>
+          <p:cNvSpPr txBox="1"/>
+          <p:nvPr/>
+        </p:nvSpPr>
+        <p:spPr>
+          <a:xfrm>
+            <a:off x="1260000" y="35827849"/>
+            <a:ext cx="648000" cy="504000"/>
+          </a:xfrm>
+          <a:prstGeom prst="rect">
+            <a:avLst/>
+          </a:prstGeom>
+          <a:noFill/>
+        </p:spPr>
+        <p:txBody>
+          <a:bodyPr wrap="square" anchor="ctr" lIns="54000" rIns="54000" tIns="0" bIns="0">
+            <a:spAutoFit/>
+          </a:bodyPr>
+          <a:lstStyle/>
+          <a:p>
+            <a:pPr algn="l">
+              <a:spcAft>
+                <a:spcPts val="0"/>
+              </a:spcAft>
+            </a:pPr>
+            <a:r>
+              <a:rPr sz="3200" b="1">
+                <a:solidFill>
+                  <a:srgbClr val="FFFFFF"/>
+                </a:solidFill>
+                <a:latin typeface="Pretendard"/>
+              </a:rPr>
+              <a:t>2b</a:t>
+            </a:r>
+          </a:p>
+        </p:txBody>
+      </p:sp>
+      <p:sp>
+        <p:nvSpPr>
+          <p:cNvPr id="26" name="TextBox 25"/>
+          <p:cNvSpPr txBox="1"/>
+          <p:nvPr/>
+        </p:nvSpPr>
+        <p:spPr>
+          <a:xfrm>
+            <a:off x="2016000" y="35827849"/>
+            <a:ext cx="7764000" cy="504000"/>
+          </a:xfrm>
+          <a:prstGeom prst="rect">
+            <a:avLst/>
+          </a:prstGeom>
+          <a:noFill/>
+        </p:spPr>
+        <p:txBody>
+          <a:bodyPr wrap="square" anchor="ctr" lIns="54000" rIns="54000" tIns="0" bIns="0">
+            <a:spAutoFit/>
+          </a:bodyPr>
+          <a:lstStyle/>
+          <a:p>
+            <a:pPr algn="l">
+              <a:spcAft>
+                <a:spcPts val="0"/>
+              </a:spcAft>
+            </a:pPr>
+            <a:r>
+              <a:rPr sz="3200" b="1">
+                <a:solidFill>
+                  <a:srgbClr val="FFFFFF"/>
+                </a:solidFill>
+                <a:latin typeface="Pretendard"/>
+              </a:rPr>
+              <a:t>사전 기준 대비 판정</a:t>
+            </a:r>
+          </a:p>
+        </p:txBody>
+      </p:sp>
+      <p:sp>
+        <p:nvSpPr>
+          <p:cNvPr id="27" name="Rectangle 26"/>
+          <p:cNvSpPr/>
+          <p:nvPr/>
+        </p:nvSpPr>
+        <p:spPr>
+          <a:xfrm>
+            <a:off x="1080000" y="36601849"/>
+            <a:ext cx="8844000" cy="576000"/>
+          </a:xfrm>
+          <a:prstGeom prst="rect">
+            <a:avLst/>
+          </a:prstGeom>
+          <a:solidFill>
+            <a:srgbClr val="F2F4F6"/>
+          </a:solidFill>
+          <a:ln>
+            <a:noFill/>
+          </a:ln>
+          <a:effectLst/>
+        </p:spPr>
+        <p:style>
+          <a:lnRef idx="1">
+            <a:schemeClr val="accent1"/>
+          </a:lnRef>
+          <a:fillRef idx="3">
+            <a:schemeClr val="accent1"/>
+          </a:fillRef>
+          <a:effectRef idx="2">
+            <a:schemeClr val="accent1"/>
+          </a:effectRef>
+          <a:fontRef idx="minor">
+            <a:schemeClr val="lt1"/>
+          </a:fontRef>
+        </p:style>
+        <p:txBody>
+          <a:bodyPr rtlCol="0" anchor="ctr"/>
+          <a:lstStyle/>
+          <a:p>
+            <a:pPr algn="ctr"/>
+          </a:p>
+        </p:txBody>
+      </p:sp>
+      <p:sp>
+        <p:nvSpPr>
+          <p:cNvPr id="28" name="TextBox 27"/>
+          <p:cNvSpPr txBox="1"/>
+          <p:nvPr/>
+        </p:nvSpPr>
+        <p:spPr>
+          <a:xfrm>
+            <a:off x="1260000" y="36637849"/>
+            <a:ext cx="6190799" cy="504000"/>
+          </a:xfrm>
+          <a:prstGeom prst="rect">
+            <a:avLst/>
+          </a:prstGeom>
+          <a:noFill/>
+        </p:spPr>
+        <p:txBody>
+          <a:bodyPr wrap="square" anchor="ctr" lIns="54000" rIns="54000" tIns="0" bIns="0">
+            <a:spAutoFit/>
+          </a:bodyPr>
+          <a:lstStyle/>
+          <a:p>
+            <a:pPr algn="l">
+              <a:spcAft>
+                <a:spcPts val="0"/>
+              </a:spcAft>
+            </a:pPr>
+            <a:r>
+              <a:rPr sz="2400" b="0">
+                <a:solidFill>
+                  <a:srgbClr val="1A1A1A"/>
+                </a:solidFill>
+                <a:latin typeface="Pretendard"/>
+              </a:rPr>
+              <a:t>① 정량 예측   Q² ≥ 0.3</a:t>
+            </a:r>
+          </a:p>
+        </p:txBody>
+      </p:sp>
+      <p:sp>
+        <p:nvSpPr>
+          <p:cNvPr id="29" name="TextBox 28"/>
+          <p:cNvSpPr txBox="1"/>
+          <p:nvPr/>
+        </p:nvSpPr>
+        <p:spPr>
+          <a:xfrm>
+            <a:off x="7270799" y="36637849"/>
+            <a:ext cx="2473200" cy="504000"/>
+          </a:xfrm>
+          <a:prstGeom prst="rect">
+            <a:avLst/>
+          </a:prstGeom>
+          <a:noFill/>
+        </p:spPr>
+        <p:txBody>
+          <a:bodyPr wrap="square" anchor="ctr" lIns="54000" rIns="54000" tIns="0" bIns="0">
+            <a:spAutoFit/>
+          </a:bodyPr>
+          <a:lstStyle/>
+          <a:p>
+            <a:pPr algn="r">
+              <a:spcAft>
+                <a:spcPts val="0"/>
+              </a:spcAft>
+            </a:pPr>
+            <a:r>
+              <a:rPr sz="2900" b="1">
+                <a:solidFill>
+                  <a:srgbClr val="D55E00"/>
+                </a:solidFill>
+                <a:latin typeface="Pretendard"/>
+              </a:rPr>
+              <a:t>-0.018   미달</a:t>
+            </a:r>
+          </a:p>
+        </p:txBody>
+      </p:sp>
+      <p:sp>
+        <p:nvSpPr>
+          <p:cNvPr id="30" name="Rectangle 29"/>
+          <p:cNvSpPr/>
+          <p:nvPr/>
+        </p:nvSpPr>
+        <p:spPr>
+          <a:xfrm>
+            <a:off x="1080000" y="37177849"/>
+            <a:ext cx="8844000" cy="576000"/>
+          </a:xfrm>
+          <a:prstGeom prst="rect">
+            <a:avLst/>
+          </a:prstGeom>
+          <a:solidFill>
+            <a:srgbClr val="FFFFFF"/>
+          </a:solidFill>
+          <a:ln>
+            <a:noFill/>
+          </a:ln>
+          <a:effectLst/>
+        </p:spPr>
+        <p:style>
+          <a:lnRef idx="1">
+            <a:schemeClr val="accent1"/>
+          </a:lnRef>
+          <a:fillRef idx="3">
+            <a:schemeClr val="accent1"/>
+          </a:fillRef>
+          <a:effectRef idx="2">
+            <a:schemeClr val="accent1"/>
+          </a:effectRef>
+          <a:fontRef idx="minor">
+            <a:schemeClr val="lt1"/>
+          </a:fontRef>
+        </p:style>
+        <p:txBody>
+          <a:bodyPr rtlCol="0" anchor="ctr"/>
+          <a:lstStyle/>
+          <a:p>
+            <a:pPr algn="ctr"/>
+          </a:p>
+        </p:txBody>
+      </p:sp>
+      <p:sp>
+        <p:nvSpPr>
+          <p:cNvPr id="31" name="TextBox 30"/>
+          <p:cNvSpPr txBox="1"/>
+          <p:nvPr/>
+        </p:nvSpPr>
+        <p:spPr>
+          <a:xfrm>
+            <a:off x="1260000" y="37213849"/>
+            <a:ext cx="6190799" cy="504000"/>
+          </a:xfrm>
+          <a:prstGeom prst="rect">
+            <a:avLst/>
+          </a:prstGeom>
+          <a:noFill/>
+        </p:spPr>
+        <p:txBody>
+          <a:bodyPr wrap="square" anchor="ctr" lIns="54000" rIns="54000" tIns="0" bIns="0">
+            <a:spAutoFit/>
+          </a:bodyPr>
+          <a:lstStyle/>
+          <a:p>
+            <a:pPr algn="l">
+              <a:spcAft>
+                <a:spcPts val="0"/>
+              </a:spcAft>
+            </a:pPr>
+            <a:r>
+              <a:rPr sz="2400" b="0">
+                <a:solidFill>
+                  <a:srgbClr val="1A1A1A"/>
+                </a:solidFill>
+                <a:latin typeface="Pretendard"/>
+              </a:rPr>
+              <a:t>② 선별   AUC ≥ 0.7</a:t>
+            </a:r>
+          </a:p>
+        </p:txBody>
+      </p:sp>
+      <p:sp>
+        <p:nvSpPr>
+          <p:cNvPr id="32" name="TextBox 31"/>
+          <p:cNvSpPr txBox="1"/>
+          <p:nvPr/>
+        </p:nvSpPr>
+        <p:spPr>
+          <a:xfrm>
+            <a:off x="7270799" y="37213849"/>
+            <a:ext cx="2473200" cy="504000"/>
+          </a:xfrm>
+          <a:prstGeom prst="rect">
+            <a:avLst/>
+          </a:prstGeom>
+          <a:noFill/>
+        </p:spPr>
+        <p:txBody>
+          <a:bodyPr wrap="square" anchor="ctr" lIns="54000" rIns="54000" tIns="0" bIns="0">
+            <a:spAutoFit/>
+          </a:bodyPr>
+          <a:lstStyle/>
+          <a:p>
+            <a:pPr algn="r">
+              <a:spcAft>
+                <a:spcPts val="0"/>
+              </a:spcAft>
+            </a:pPr>
+            <a:r>
+              <a:rPr sz="2900" b="1">
+                <a:solidFill>
+                  <a:srgbClr val="D55E00"/>
+                </a:solidFill>
+                <a:latin typeface="Pretendard"/>
+              </a:rPr>
+              <a:t>0.574   미달</a:t>
+            </a:r>
+          </a:p>
+        </p:txBody>
+      </p:sp>
+      <p:sp>
+        <p:nvSpPr>
+          <p:cNvPr id="33" name="Rectangle 32"/>
+          <p:cNvSpPr/>
+          <p:nvPr/>
+        </p:nvSpPr>
+        <p:spPr>
+          <a:xfrm>
+            <a:off x="1080000" y="37753849"/>
+            <a:ext cx="8844000" cy="576000"/>
+          </a:xfrm>
+          <a:prstGeom prst="rect">
+            <a:avLst/>
+          </a:prstGeom>
+          <a:solidFill>
+            <a:srgbClr val="F2F4F6"/>
+          </a:solidFill>
+          <a:ln>
+            <a:noFill/>
+          </a:ln>
+          <a:effectLst/>
+        </p:spPr>
+        <p:style>
+          <a:lnRef idx="1">
+            <a:schemeClr val="accent1"/>
+          </a:lnRef>
+          <a:fillRef idx="3">
+            <a:schemeClr val="accent1"/>
+          </a:fillRef>
+          <a:effectRef idx="2">
+            <a:schemeClr val="accent1"/>
+          </a:effectRef>
+          <a:fontRef idx="minor">
+            <a:schemeClr val="lt1"/>
+          </a:fontRef>
+        </p:style>
+        <p:txBody>
+          <a:bodyPr rtlCol="0" anchor="ctr"/>
+          <a:lstStyle/>
+          <a:p>
+            <a:pPr algn="ctr"/>
+          </a:p>
+        </p:txBody>
+      </p:sp>
+      <p:sp>
+        <p:nvSpPr>
+          <p:cNvPr id="34" name="TextBox 33"/>
+          <p:cNvSpPr txBox="1"/>
+          <p:nvPr/>
+        </p:nvSpPr>
+        <p:spPr>
+          <a:xfrm>
+            <a:off x="1260000" y="37789849"/>
+            <a:ext cx="6190799" cy="504000"/>
+          </a:xfrm>
+          <a:prstGeom prst="rect">
+            <a:avLst/>
+          </a:prstGeom>
+          <a:noFill/>
+        </p:spPr>
+        <p:txBody>
+          <a:bodyPr wrap="square" anchor="ctr" lIns="54000" rIns="54000" tIns="0" bIns="0">
+            <a:spAutoFit/>
+          </a:bodyPr>
+          <a:lstStyle/>
+          <a:p>
+            <a:pPr algn="l">
+              <a:spcAft>
+                <a:spcPts val="0"/>
+              </a:spcAft>
+            </a:pPr>
+            <a:r>
+              <a:rPr sz="2400" b="0">
+                <a:solidFill>
+                  <a:srgbClr val="1A1A1A"/>
+                </a:solidFill>
+                <a:latin typeface="Pretendard"/>
+              </a:rPr>
+              <a:t>② 선별   순열 p &lt; 0.05</a:t>
+            </a:r>
+          </a:p>
+        </p:txBody>
+      </p:sp>
+      <p:sp>
+        <p:nvSpPr>
+          <p:cNvPr id="35" name="TextBox 34"/>
+          <p:cNvSpPr txBox="1"/>
+          <p:nvPr/>
+        </p:nvSpPr>
+        <p:spPr>
+          <a:xfrm>
+            <a:off x="7270799" y="37789849"/>
+            <a:ext cx="2473200" cy="504000"/>
+          </a:xfrm>
+          <a:prstGeom prst="rect">
+            <a:avLst/>
+          </a:prstGeom>
+          <a:noFill/>
+        </p:spPr>
+        <p:txBody>
+          <a:bodyPr wrap="square" anchor="ctr" lIns="54000" rIns="54000" tIns="0" bIns="0">
+            <a:spAutoFit/>
+          </a:bodyPr>
+          <a:lstStyle/>
+          <a:p>
+            <a:pPr algn="r">
+              <a:spcAft>
+                <a:spcPts val="0"/>
+              </a:spcAft>
+            </a:pPr>
+            <a:r>
+              <a:rPr sz="2900" b="1">
+                <a:solidFill>
+                  <a:srgbClr val="D55E00"/>
+                </a:solidFill>
+                <a:latin typeface="Pretendard"/>
+              </a:rPr>
+              <a:t>0.31878   미달</a:t>
+            </a:r>
+          </a:p>
+        </p:txBody>
+      </p:sp>
+      <p:sp>
+        <p:nvSpPr>
+          <p:cNvPr id="36" name="Rectangle 35"/>
+          <p:cNvSpPr/>
+          <p:nvPr/>
+        </p:nvSpPr>
+        <p:spPr>
+          <a:xfrm>
+            <a:off x="1080000" y="38329849"/>
+            <a:ext cx="8844000" cy="576000"/>
+          </a:xfrm>
+          <a:prstGeom prst="rect">
+            <a:avLst/>
+          </a:prstGeom>
+          <a:solidFill>
+            <a:srgbClr val="FFFFFF"/>
+          </a:solidFill>
+          <a:ln>
+            <a:noFill/>
+          </a:ln>
+          <a:effectLst/>
+        </p:spPr>
+        <p:style>
+          <a:lnRef idx="1">
+            <a:schemeClr val="accent1"/>
+          </a:lnRef>
+          <a:fillRef idx="3">
+            <a:schemeClr val="accent1"/>
+          </a:fillRef>
+          <a:effectRef idx="2">
+            <a:schemeClr val="accent1"/>
+          </a:effectRef>
+          <a:fontRef idx="minor">
+            <a:schemeClr val="lt1"/>
+          </a:fontRef>
+        </p:style>
+        <p:txBody>
+          <a:bodyPr rtlCol="0" anchor="ctr"/>
+          <a:lstStyle/>
+          <a:p>
+            <a:pPr algn="ctr"/>
+          </a:p>
+        </p:txBody>
+      </p:sp>
+      <p:sp>
+        <p:nvSpPr>
+          <p:cNvPr id="37" name="TextBox 36"/>
+          <p:cNvSpPr txBox="1"/>
+          <p:nvPr/>
+        </p:nvSpPr>
+        <p:spPr>
+          <a:xfrm>
+            <a:off x="1260000" y="38365849"/>
+            <a:ext cx="6190799" cy="504000"/>
+          </a:xfrm>
+          <a:prstGeom prst="rect">
+            <a:avLst/>
+          </a:prstGeom>
+          <a:noFill/>
+        </p:spPr>
+        <p:txBody>
+          <a:bodyPr wrap="square" anchor="ctr" lIns="54000" rIns="54000" tIns="0" bIns="0">
+            <a:spAutoFit/>
+          </a:bodyPr>
+          <a:lstStyle/>
+          <a:p>
+            <a:pPr algn="l">
+              <a:spcAft>
+                <a:spcPts val="0"/>
+              </a:spcAft>
+            </a:pPr>
+            <a:r>
+              <a:rPr sz="2400" b="0">
+                <a:solidFill>
+                  <a:srgbClr val="1A1A1A"/>
+                </a:solidFill>
+                <a:latin typeface="Pretendard"/>
+              </a:rPr>
+              <a:t>③ 골격 통제 후 60% 유지</a:t>
+            </a:r>
+          </a:p>
+        </p:txBody>
+      </p:sp>
+      <p:sp>
+        <p:nvSpPr>
+          <p:cNvPr id="38" name="TextBox 37"/>
+          <p:cNvSpPr txBox="1"/>
+          <p:nvPr/>
+        </p:nvSpPr>
+        <p:spPr>
+          <a:xfrm>
+            <a:off x="7270799" y="38365849"/>
+            <a:ext cx="2473200" cy="504000"/>
+          </a:xfrm>
+          <a:prstGeom prst="rect">
+            <a:avLst/>
+          </a:prstGeom>
+          <a:noFill/>
+        </p:spPr>
+        <p:txBody>
+          <a:bodyPr wrap="square" anchor="ctr" lIns="54000" rIns="54000" tIns="0" bIns="0">
+            <a:spAutoFit/>
+          </a:bodyPr>
+          <a:lstStyle/>
+          <a:p>
+            <a:pPr algn="r">
+              <a:spcAft>
+                <a:spcPts val="0"/>
+              </a:spcAft>
+            </a:pPr>
+            <a:r>
+              <a:rPr sz="2900" b="1">
+                <a:solidFill>
+                  <a:srgbClr val="D55E00"/>
+                </a:solidFill>
+                <a:latin typeface="Pretendard"/>
+              </a:rPr>
+              <a:t>판정 불가</a:t>
+            </a:r>
+          </a:p>
+        </p:txBody>
+      </p:sp>
+      <p:sp>
+        <p:nvSpPr>
+          <p:cNvPr id="39" name="Rectangle 38"/>
+          <p:cNvSpPr/>
+          <p:nvPr/>
+        </p:nvSpPr>
+        <p:spPr>
+          <a:xfrm>
+            <a:off x="1080000" y="38905849"/>
+            <a:ext cx="8844000" cy="576000"/>
+          </a:xfrm>
+          <a:prstGeom prst="rect">
+            <a:avLst/>
+          </a:prstGeom>
+          <a:solidFill>
+            <a:srgbClr val="F2F4F6"/>
+          </a:solidFill>
+          <a:ln>
+            <a:noFill/>
+          </a:ln>
+          <a:effectLst/>
+        </p:spPr>
+        <p:style>
+          <a:lnRef idx="1">
+            <a:schemeClr val="accent1"/>
+          </a:lnRef>
+          <a:fillRef idx="3">
+            <a:schemeClr val="accent1"/>
+          </a:fillRef>
+          <a:effectRef idx="2">
+            <a:schemeClr val="accent1"/>
+          </a:effectRef>
+          <a:fontRef idx="minor">
+            <a:schemeClr val="lt1"/>
+          </a:fontRef>
+        </p:style>
+        <p:txBody>
+          <a:bodyPr rtlCol="0" anchor="ctr"/>
+          <a:lstStyle/>
+          <a:p>
+            <a:pPr algn="ctr"/>
+          </a:p>
+        </p:txBody>
+      </p:sp>
+      <p:sp>
+        <p:nvSpPr>
+          <p:cNvPr id="40" name="TextBox 39"/>
+          <p:cNvSpPr txBox="1"/>
+          <p:nvPr/>
+        </p:nvSpPr>
+        <p:spPr>
+          <a:xfrm>
+            <a:off x="1260000" y="38941849"/>
+            <a:ext cx="6190799" cy="504000"/>
+          </a:xfrm>
+          <a:prstGeom prst="rect">
+            <a:avLst/>
+          </a:prstGeom>
+          <a:noFill/>
+        </p:spPr>
+        <p:txBody>
+          <a:bodyPr wrap="square" anchor="ctr" lIns="54000" rIns="54000" tIns="0" bIns="0">
+            <a:spAutoFit/>
+          </a:bodyPr>
+          <a:lstStyle/>
+          <a:p>
+            <a:pPr algn="l">
+              <a:spcAft>
+                <a:spcPts val="0"/>
+              </a:spcAft>
+            </a:pPr>
+            <a:r>
+              <a:rPr sz="2400" b="0">
+                <a:solidFill>
+                  <a:srgbClr val="1A1A1A"/>
+                </a:solidFill>
+                <a:latin typeface="Pretendard"/>
+              </a:rPr>
+              <a:t>④ 병목 특정   후보 제거</a:t>
+            </a:r>
+          </a:p>
+        </p:txBody>
+      </p:sp>
+      <p:sp>
+        <p:nvSpPr>
+          <p:cNvPr id="41" name="TextBox 40"/>
+          <p:cNvSpPr txBox="1"/>
+          <p:nvPr/>
+        </p:nvSpPr>
+        <p:spPr>
+          <a:xfrm>
+            <a:off x="7270799" y="38941849"/>
+            <a:ext cx="2473200" cy="504000"/>
+          </a:xfrm>
+          <a:prstGeom prst="rect">
+            <a:avLst/>
+          </a:prstGeom>
+          <a:noFill/>
+        </p:spPr>
+        <p:txBody>
+          <a:bodyPr wrap="square" anchor="ctr" lIns="54000" rIns="54000" tIns="0" bIns="0">
+            <a:spAutoFit/>
+          </a:bodyPr>
+          <a:lstStyle/>
+          <a:p>
+            <a:pPr algn="r">
+              <a:spcAft>
+                <a:spcPts val="0"/>
+              </a:spcAft>
+            </a:pPr>
+            <a:r>
+              <a:rPr sz="2900" b="1">
+                <a:solidFill>
+                  <a:srgbClr val="009E73"/>
+                </a:solidFill>
+                <a:latin typeface="Pretendard"/>
+              </a:rPr>
+              <a:t>4건 제거</a:t>
+            </a:r>
+          </a:p>
+        </p:txBody>
+      </p:sp>
+      <p:sp>
+        <p:nvSpPr>
+          <p:cNvPr id="42" name="TextBox 41"/>
+          <p:cNvSpPr txBox="1"/>
+          <p:nvPr/>
+        </p:nvSpPr>
+        <p:spPr>
+          <a:xfrm>
+            <a:off x="1080000" y="39697849"/>
+            <a:ext cx="8844000" cy="829475"/>
+          </a:xfrm>
+          <a:prstGeom prst="rect">
+            <a:avLst/>
+          </a:prstGeom>
+          <a:noFill/>
+        </p:spPr>
+        <p:txBody>
+          <a:bodyPr wrap="square" anchor="t" lIns="54000" rIns="54000" tIns="0" bIns="0">
+            <a:spAutoFit/>
+          </a:bodyPr>
+          <a:lstStyle/>
+          <a:p>
+            <a:pPr algn="l">
+              <a:spcAft>
+                <a:spcPts val="0"/>
+              </a:spcAft>
+            </a:pPr>
+            <a:r>
+              <a:rPr sz="2100" b="0">
+                <a:solidFill>
+                  <a:srgbClr val="5A636B"/>
+                </a:solidFill>
+                <a:latin typeface="Pretendard"/>
+              </a:rPr>
+              <a:t>③ 은 원상관 자체가 유의하지 않아 “유지” 를 물을 수 없다. ④ 는 두 갈래에서 각각 2건씩이며 하나로 세지 않는다.</a:t>
+            </a:r>
+          </a:p>
+        </p:txBody>
+      </p:sp>
+      <p:sp>
+        <p:nvSpPr>
+          <p:cNvPr id="43" name="Rectangle 42"/>
+          <p:cNvSpPr/>
+          <p:nvPr/>
+        </p:nvSpPr>
+        <p:spPr>
+          <a:xfrm>
+            <a:off x="10715999" y="17810568"/>
             <a:ext cx="8844000" cy="612000"/>
           </a:xfrm>
           <a:prstGeom prst="rect">
@@ -4160,13 +4931,13 @@
       </p:sp>
       <p:sp>
         <p:nvSpPr>
-          <p:cNvPr id="25" name="TextBox 24"/>
+          <p:cNvPr id="44" name="TextBox 43"/>
           <p:cNvSpPr txBox="1"/>
           <p:nvPr/>
         </p:nvSpPr>
         <p:spPr>
           <a:xfrm>
-            <a:off x="10895999" y="18136007"/>
+            <a:off x="10895999" y="17864568"/>
             <a:ext cx="648000" cy="504000"/>
           </a:xfrm>
           <a:prstGeom prst="rect">
@@ -4199,13 +4970,13 @@
       </p:sp>
       <p:sp>
         <p:nvSpPr>
-          <p:cNvPr id="26" name="TextBox 25"/>
+          <p:cNvPr id="45" name="TextBox 44"/>
           <p:cNvSpPr txBox="1"/>
           <p:nvPr/>
         </p:nvSpPr>
         <p:spPr>
           <a:xfrm>
-            <a:off x="11651999" y="18136007"/>
+            <a:off x="11651999" y="17864568"/>
             <a:ext cx="7764000" cy="504000"/>
           </a:xfrm>
           <a:prstGeom prst="rect">
@@ -4238,7 +5009,7 @@
       </p:sp>
       <p:pic>
         <p:nvPicPr>
-          <p:cNvPr id="27" name="Picture 26" descr="fig03_control.png"/>
+          <p:cNvPr id="46" name="Picture 45" descr="fig03_control.png"/>
           <p:cNvPicPr>
             <a:picLocks noChangeAspect="1"/>
           </p:cNvPicPr>
@@ -4252,7 +5023,7 @@
         </p:blipFill>
         <p:spPr>
           <a:xfrm>
-            <a:off x="10715999" y="18910006"/>
+            <a:off x="10715999" y="18638568"/>
             <a:ext cx="8844000" cy="4330725"/>
           </a:xfrm>
           <a:prstGeom prst="rect">
@@ -4262,13 +5033,13 @@
       </p:pic>
       <p:sp>
         <p:nvSpPr>
-          <p:cNvPr id="28" name="Rectangle 27"/>
+          <p:cNvPr id="47" name="Rectangle 46"/>
           <p:cNvSpPr/>
           <p:nvPr/>
         </p:nvSpPr>
         <p:spPr>
           <a:xfrm>
-            <a:off x="10715999" y="23420731"/>
+            <a:off x="10715999" y="23149293"/>
             <a:ext cx="8844000" cy="576000"/>
           </a:xfrm>
           <a:prstGeom prst="rect">
@@ -4306,13 +5077,13 @@
       </p:sp>
       <p:sp>
         <p:nvSpPr>
-          <p:cNvPr id="29" name="TextBox 28"/>
+          <p:cNvPr id="48" name="TextBox 47"/>
           <p:cNvSpPr txBox="1"/>
           <p:nvPr/>
         </p:nvSpPr>
         <p:spPr>
           <a:xfrm>
-            <a:off x="10895999" y="23456731"/>
+            <a:off x="10895999" y="23185293"/>
             <a:ext cx="4422000" cy="504000"/>
           </a:xfrm>
           <a:prstGeom prst="rect">
@@ -4345,13 +5116,13 @@
       </p:sp>
       <p:sp>
         <p:nvSpPr>
-          <p:cNvPr id="30" name="TextBox 29"/>
+          <p:cNvPr id="49" name="TextBox 48"/>
           <p:cNvSpPr txBox="1"/>
           <p:nvPr/>
         </p:nvSpPr>
         <p:spPr>
           <a:xfrm>
-            <a:off x="15137999" y="23456731"/>
+            <a:off x="15137999" y="23185293"/>
             <a:ext cx="4242000" cy="504000"/>
           </a:xfrm>
           <a:prstGeom prst="rect">
@@ -4384,13 +5155,13 @@
       </p:sp>
       <p:sp>
         <p:nvSpPr>
-          <p:cNvPr id="31" name="Rectangle 30"/>
+          <p:cNvPr id="50" name="Rectangle 49"/>
           <p:cNvSpPr/>
           <p:nvPr/>
         </p:nvSpPr>
         <p:spPr>
           <a:xfrm>
-            <a:off x="10715999" y="23996731"/>
+            <a:off x="10715999" y="23725293"/>
             <a:ext cx="8844000" cy="576000"/>
           </a:xfrm>
           <a:prstGeom prst="rect">
@@ -4428,13 +5199,13 @@
       </p:sp>
       <p:sp>
         <p:nvSpPr>
-          <p:cNvPr id="32" name="TextBox 31"/>
+          <p:cNvPr id="51" name="TextBox 50"/>
           <p:cNvSpPr txBox="1"/>
           <p:nvPr/>
         </p:nvSpPr>
         <p:spPr>
           <a:xfrm>
-            <a:off x="10895999" y="24032731"/>
+            <a:off x="10895999" y="23761293"/>
             <a:ext cx="4422000" cy="504000"/>
           </a:xfrm>
           <a:prstGeom prst="rect">
@@ -4467,13 +5238,13 @@
       </p:sp>
       <p:sp>
         <p:nvSpPr>
-          <p:cNvPr id="33" name="TextBox 32"/>
+          <p:cNvPr id="52" name="TextBox 51"/>
           <p:cNvSpPr txBox="1"/>
           <p:nvPr/>
         </p:nvSpPr>
         <p:spPr>
           <a:xfrm>
-            <a:off x="15137999" y="24032731"/>
+            <a:off x="15137999" y="23761293"/>
             <a:ext cx="4242000" cy="504000"/>
           </a:xfrm>
           <a:prstGeom prst="rect">
@@ -4506,13 +5277,13 @@
       </p:sp>
       <p:sp>
         <p:nvSpPr>
-          <p:cNvPr id="34" name="TextBox 33"/>
+          <p:cNvPr id="53" name="TextBox 52"/>
           <p:cNvSpPr txBox="1"/>
           <p:nvPr/>
         </p:nvSpPr>
         <p:spPr>
           <a:xfrm>
-            <a:off x="10715999" y="24788731"/>
+            <a:off x="10715999" y="24517293"/>
             <a:ext cx="8844000" cy="973756"/>
           </a:xfrm>
           <a:prstGeom prst="rect">
@@ -4545,13 +5316,13 @@
       </p:sp>
       <p:sp>
         <p:nvSpPr>
-          <p:cNvPr id="35" name="Rectangle 34"/>
+          <p:cNvPr id="54" name="Rectangle 53"/>
           <p:cNvSpPr/>
           <p:nvPr/>
         </p:nvSpPr>
         <p:spPr>
           <a:xfrm>
-            <a:off x="10715999" y="25978488"/>
+            <a:off x="10715999" y="25707049"/>
             <a:ext cx="8844000" cy="612000"/>
           </a:xfrm>
           <a:prstGeom prst="rect">
@@ -4589,13 +5360,13 @@
       </p:sp>
       <p:sp>
         <p:nvSpPr>
-          <p:cNvPr id="36" name="TextBox 35"/>
+          <p:cNvPr id="55" name="TextBox 54"/>
           <p:cNvSpPr txBox="1"/>
           <p:nvPr/>
         </p:nvSpPr>
         <p:spPr>
           <a:xfrm>
-            <a:off x="10895999" y="26032488"/>
+            <a:off x="10895999" y="25761049"/>
             <a:ext cx="648000" cy="504000"/>
           </a:xfrm>
           <a:prstGeom prst="rect">
@@ -4628,13 +5399,13 @@
       </p:sp>
       <p:sp>
         <p:nvSpPr>
-          <p:cNvPr id="37" name="TextBox 36"/>
+          <p:cNvPr id="56" name="TextBox 55"/>
           <p:cNvSpPr txBox="1"/>
           <p:nvPr/>
         </p:nvSpPr>
         <p:spPr>
           <a:xfrm>
-            <a:off x="11651999" y="26032488"/>
+            <a:off x="11651999" y="25761049"/>
             <a:ext cx="7764000" cy="504000"/>
           </a:xfrm>
           <a:prstGeom prst="rect">
@@ -4660,20 +5431,20 @@
                 </a:solidFill>
                 <a:latin typeface="Pretendard"/>
               </a:rPr>
-              <a:t>원인 후보를 실험으로 제거</a:t>
-            </a:r>
-          </a:p>
-        </p:txBody>
-      </p:sp>
-      <p:sp>
-        <p:nvSpPr>
-          <p:cNvPr id="38" name="Rectangle 37"/>
+              <a:t>C2 실패 원인을 실험으로 제거</a:t>
+            </a:r>
+          </a:p>
+        </p:txBody>
+      </p:sp>
+      <p:sp>
+        <p:nvSpPr>
+          <p:cNvPr id="57" name="Rectangle 56"/>
           <p:cNvSpPr/>
           <p:nvPr/>
         </p:nvSpPr>
         <p:spPr>
           <a:xfrm>
-            <a:off x="10715999" y="26806488"/>
+            <a:off x="10715999" y="26535049"/>
             <a:ext cx="8844000" cy="576000"/>
           </a:xfrm>
           <a:prstGeom prst="rect">
@@ -4711,14 +5482,14 @@
       </p:sp>
       <p:sp>
         <p:nvSpPr>
-          <p:cNvPr id="39" name="TextBox 38"/>
+          <p:cNvPr id="58" name="TextBox 57"/>
           <p:cNvSpPr txBox="1"/>
           <p:nvPr/>
         </p:nvSpPr>
         <p:spPr>
           <a:xfrm>
-            <a:off x="10895999" y="26842488"/>
-            <a:ext cx="5129519" cy="504000"/>
+            <a:off x="10895999" y="26571049"/>
+            <a:ext cx="5306399" cy="504000"/>
           </a:xfrm>
           <a:prstGeom prst="rect">
             <a:avLst/>
@@ -4743,21 +5514,21 @@
                 </a:solidFill>
                 <a:latin typeface="Pretendard"/>
               </a:rPr>
-              <a:t>탐색 깊이 4 → 128</a:t>
-            </a:r>
-          </a:p>
-        </p:txBody>
-      </p:sp>
-      <p:sp>
-        <p:nvSpPr>
-          <p:cNvPr id="40" name="TextBox 39"/>
+              <a:t>탐색 깊이 4 → 128 (32배)</a:t>
+            </a:r>
+          </a:p>
+        </p:txBody>
+      </p:sp>
+      <p:sp>
+        <p:nvSpPr>
+          <p:cNvPr id="59" name="TextBox 58"/>
           <p:cNvSpPr txBox="1"/>
           <p:nvPr/>
         </p:nvSpPr>
         <p:spPr>
           <a:xfrm>
-            <a:off x="15845520" y="26842488"/>
-            <a:ext cx="3534480" cy="504000"/>
+            <a:off x="16022399" y="26571049"/>
+            <a:ext cx="3357600" cy="504000"/>
           </a:xfrm>
           <a:prstGeom prst="rect">
             <a:avLst/>
@@ -4782,20 +5553,20 @@
                 </a:solidFill>
                 <a:latin typeface="Pretendard"/>
               </a:rPr>
-              <a:t>C2 0% 고정</a:t>
-            </a:r>
-          </a:p>
-        </p:txBody>
-      </p:sp>
-      <p:sp>
-        <p:nvSpPr>
-          <p:cNvPr id="41" name="Rectangle 40"/>
+              <a:t>C2 전 구간 0%</a:t>
+            </a:r>
+          </a:p>
+        </p:txBody>
+      </p:sp>
+      <p:sp>
+        <p:nvSpPr>
+          <p:cNvPr id="60" name="Rectangle 59"/>
           <p:cNvSpPr/>
           <p:nvPr/>
         </p:nvSpPr>
         <p:spPr>
           <a:xfrm>
-            <a:off x="10715999" y="27382488"/>
+            <a:off x="10715999" y="27111049"/>
             <a:ext cx="8844000" cy="576000"/>
           </a:xfrm>
           <a:prstGeom prst="rect">
@@ -4833,14 +5604,14 @@
       </p:sp>
       <p:sp>
         <p:nvSpPr>
-          <p:cNvPr id="42" name="TextBox 41"/>
+          <p:cNvPr id="61" name="TextBox 60"/>
           <p:cNvSpPr txBox="1"/>
           <p:nvPr/>
         </p:nvSpPr>
         <p:spPr>
           <a:xfrm>
-            <a:off x="10895999" y="27418488"/>
-            <a:ext cx="5129519" cy="504000"/>
+            <a:off x="10895999" y="27147049"/>
+            <a:ext cx="5306399" cy="504000"/>
           </a:xfrm>
           <a:prstGeom prst="rect">
             <a:avLst/>
@@ -4872,14 +5643,14 @@
       </p:sp>
       <p:sp>
         <p:nvSpPr>
-          <p:cNvPr id="43" name="TextBox 42"/>
+          <p:cNvPr id="62" name="TextBox 61"/>
           <p:cNvSpPr txBox="1"/>
           <p:nvPr/>
         </p:nvSpPr>
         <p:spPr>
           <a:xfrm>
-            <a:off x="15845520" y="27418488"/>
-            <a:ext cx="3534480" cy="504000"/>
+            <a:off x="16022399" y="27147049"/>
+            <a:ext cx="3357600" cy="504000"/>
           </a:xfrm>
           <a:prstGeom prst="rect">
             <a:avLst/>
@@ -4911,13 +5682,216 @@
       </p:sp>
       <p:sp>
         <p:nvSpPr>
-          <p:cNvPr id="44" name="Rectangle 43"/>
+          <p:cNvPr id="63" name="TextBox 62"/>
+          <p:cNvSpPr txBox="1"/>
+          <p:nvPr/>
+        </p:nvSpPr>
+        <p:spPr>
+          <a:xfrm>
+            <a:off x="10715999" y="27903049"/>
+            <a:ext cx="8844000" cy="1424635"/>
+          </a:xfrm>
+          <a:prstGeom prst="rect">
+            <a:avLst/>
+          </a:prstGeom>
+          <a:noFill/>
+        </p:spPr>
+        <p:txBody>
+          <a:bodyPr wrap="square" anchor="t" lIns="54000" rIns="54000" tIns="0" bIns="0">
+            <a:spAutoFit/>
+          </a:bodyPr>
+          <a:lstStyle/>
+          <a:p>
+            <a:pPr algn="l">
+              <a:spcAft>
+                <a:spcPts val="0"/>
+              </a:spcAft>
+            </a:pPr>
+            <a:r>
+              <a:rPr sz="2500" b="0">
+                <a:solidFill>
+                  <a:srgbClr val="1A1A1A"/>
+                </a:solidFill>
+                <a:latin typeface="Pretendard"/>
+              </a:rPr>
+              <a:t>프로토네이션이 왜 무효였는지까지 확인했다. </a:t>
+            </a:r>
+            <a:r>
+              <a:rPr sz="2500" b="1">
+                <a:solidFill>
+                  <a:srgbClr val="D55E00"/>
+                </a:solidFill>
+                <a:latin typeface="Pretendard"/>
+              </a:rPr>
+              <a:t>기본 Vina 함수에는 정전기 항이 없다</a:t>
+            </a:r>
+            <a:r>
+              <a:rPr sz="2500" b="0">
+                <a:solidFill>
+                  <a:srgbClr val="1A1A1A"/>
+                </a:solidFill>
+                <a:latin typeface="Pretendard"/>
+              </a:rPr>
+              <a:t> — 형식전하는 점수에 닿지 못하고, 바뀐 수소결합 타이핑도 그 질소가 결합 거리 밖이라 항 값이 움직이지 않았다.</a:t>
+            </a:r>
+          </a:p>
+        </p:txBody>
+      </p:sp>
+      <p:pic>
+        <p:nvPicPr>
+          <p:cNvPr id="64" name="Picture 63" descr="fig08_exhaustiveness.png"/>
+          <p:cNvPicPr>
+            <a:picLocks noChangeAspect="1"/>
+          </p:cNvPicPr>
+          <p:nvPr/>
+        </p:nvPicPr>
+        <p:blipFill>
+          <a:blip r:embed="rId5"/>
+          <a:stretch>
+            <a:fillRect/>
+          </a:stretch>
+        </p:blipFill>
+        <p:spPr>
+          <a:xfrm>
+            <a:off x="10715999" y="29543685"/>
+            <a:ext cx="8844000" cy="3239388"/>
+          </a:xfrm>
+          <a:prstGeom prst="rect">
+            <a:avLst/>
+          </a:prstGeom>
+        </p:spPr>
+      </p:pic>
+      <p:sp>
+        <p:nvSpPr>
+          <p:cNvPr id="65" name="Rectangle 64"/>
           <p:cNvSpPr/>
           <p:nvPr/>
         </p:nvSpPr>
         <p:spPr>
           <a:xfrm>
-            <a:off x="10715999" y="27958488"/>
+            <a:off x="10715999" y="32963073"/>
+            <a:ext cx="8844000" cy="612000"/>
+          </a:xfrm>
+          <a:prstGeom prst="rect">
+            <a:avLst/>
+          </a:prstGeom>
+          <a:solidFill>
+            <a:srgbClr val="5A636B"/>
+          </a:solidFill>
+          <a:ln>
+            <a:noFill/>
+          </a:ln>
+          <a:effectLst/>
+        </p:spPr>
+        <p:style>
+          <a:lnRef idx="1">
+            <a:schemeClr val="accent1"/>
+          </a:lnRef>
+          <a:fillRef idx="3">
+            <a:schemeClr val="accent1"/>
+          </a:fillRef>
+          <a:effectRef idx="2">
+            <a:schemeClr val="accent1"/>
+          </a:effectRef>
+          <a:fontRef idx="minor">
+            <a:schemeClr val="lt1"/>
+          </a:fontRef>
+        </p:style>
+        <p:txBody>
+          <a:bodyPr rtlCol="0" anchor="ctr"/>
+          <a:lstStyle/>
+          <a:p>
+            <a:pPr algn="ctr"/>
+          </a:p>
+        </p:txBody>
+      </p:sp>
+      <p:sp>
+        <p:nvSpPr>
+          <p:cNvPr id="66" name="TextBox 65"/>
+          <p:cNvSpPr txBox="1"/>
+          <p:nvPr/>
+        </p:nvSpPr>
+        <p:spPr>
+          <a:xfrm>
+            <a:off x="10895999" y="33017073"/>
+            <a:ext cx="648000" cy="504000"/>
+          </a:xfrm>
+          <a:prstGeom prst="rect">
+            <a:avLst/>
+          </a:prstGeom>
+          <a:noFill/>
+        </p:spPr>
+        <p:txBody>
+          <a:bodyPr wrap="square" anchor="ctr" lIns="54000" rIns="54000" tIns="0" bIns="0">
+            <a:spAutoFit/>
+          </a:bodyPr>
+          <a:lstStyle/>
+          <a:p>
+            <a:pPr algn="l">
+              <a:spcAft>
+                <a:spcPts val="0"/>
+              </a:spcAft>
+            </a:pPr>
+            <a:r>
+              <a:rPr sz="3200" b="1">
+                <a:solidFill>
+                  <a:srgbClr val="FFFFFF"/>
+                </a:solidFill>
+                <a:latin typeface="Pretendard"/>
+              </a:rPr>
+              <a:t>5</a:t>
+            </a:r>
+          </a:p>
+        </p:txBody>
+      </p:sp>
+      <p:sp>
+        <p:nvSpPr>
+          <p:cNvPr id="67" name="TextBox 66"/>
+          <p:cNvSpPr txBox="1"/>
+          <p:nvPr/>
+        </p:nvSpPr>
+        <p:spPr>
+          <a:xfrm>
+            <a:off x="11651999" y="33017073"/>
+            <a:ext cx="7764000" cy="504000"/>
+          </a:xfrm>
+          <a:prstGeom prst="rect">
+            <a:avLst/>
+          </a:prstGeom>
+          <a:noFill/>
+        </p:spPr>
+        <p:txBody>
+          <a:bodyPr wrap="square" anchor="ctr" lIns="54000" rIns="54000" tIns="0" bIns="0">
+            <a:spAutoFit/>
+          </a:bodyPr>
+          <a:lstStyle/>
+          <a:p>
+            <a:pPr algn="l">
+              <a:spcAft>
+                <a:spcPts val="0"/>
+              </a:spcAft>
+            </a:pPr>
+            <a:r>
+              <a:rPr sz="3200" b="1">
+                <a:solidFill>
+                  <a:srgbClr val="FFFFFF"/>
+                </a:solidFill>
+                <a:latin typeface="Pretendard"/>
+              </a:rPr>
+              <a:t>별개 질문 — 비재현</a:t>
+            </a:r>
+          </a:p>
+        </p:txBody>
+      </p:sp>
+      <p:sp>
+        <p:nvSpPr>
+          <p:cNvPr id="68" name="Rectangle 67"/>
+          <p:cNvSpPr/>
+          <p:nvPr/>
+        </p:nvSpPr>
+        <p:spPr>
+          <a:xfrm>
+            <a:off x="10715999" y="33791073"/>
             <a:ext cx="8844000" cy="576000"/>
           </a:xfrm>
           <a:prstGeom prst="rect">
@@ -4955,14 +5929,14 @@
       </p:sp>
       <p:sp>
         <p:nvSpPr>
-          <p:cNvPr id="45" name="TextBox 44"/>
+          <p:cNvPr id="69" name="TextBox 68"/>
           <p:cNvSpPr txBox="1"/>
           <p:nvPr/>
         </p:nvSpPr>
         <p:spPr>
           <a:xfrm>
-            <a:off x="10895999" y="27994488"/>
-            <a:ext cx="5129519" cy="504000"/>
+            <a:off x="10895999" y="33827073"/>
+            <a:ext cx="5483280" cy="504000"/>
           </a:xfrm>
           <a:prstGeom prst="rect">
             <a:avLst/>
@@ -4987,21 +5961,21 @@
                 </a:solidFill>
                 <a:latin typeface="Pretendard"/>
               </a:rPr>
-              <a:t>골격 교란 (옛 데이터)</a:t>
-            </a:r>
-          </a:p>
-        </p:txBody>
-      </p:sp>
-      <p:sp>
-        <p:nvSpPr>
-          <p:cNvPr id="46" name="TextBox 45"/>
+              <a:t>골격 교란 (옛 데이터에 통제)</a:t>
+            </a:r>
+          </a:p>
+        </p:txBody>
+      </p:sp>
+      <p:sp>
+        <p:nvSpPr>
+          <p:cNvPr id="70" name="TextBox 69"/>
           <p:cNvSpPr txBox="1"/>
           <p:nvPr/>
         </p:nvSpPr>
         <p:spPr>
           <a:xfrm>
-            <a:off x="15845520" y="27994488"/>
-            <a:ext cx="3534480" cy="504000"/>
+            <a:off x="16199279" y="33827073"/>
+            <a:ext cx="3180719" cy="504000"/>
           </a:xfrm>
           <a:prstGeom prst="rect">
             <a:avLst/>
@@ -5022,7 +5996,7 @@
             <a:r>
               <a:rPr sz="2900" b="1">
                 <a:solidFill>
-                  <a:srgbClr val="009E73"/>
+                  <a:srgbClr val="5A636B"/>
                 </a:solidFill>
                 <a:latin typeface="Pretendard"/>
               </a:rPr>
@@ -5033,13 +6007,13 @@
       </p:sp>
       <p:sp>
         <p:nvSpPr>
-          <p:cNvPr id="47" name="Rectangle 46"/>
+          <p:cNvPr id="71" name="Rectangle 70"/>
           <p:cNvSpPr/>
           <p:nvPr/>
         </p:nvSpPr>
         <p:spPr>
           <a:xfrm>
-            <a:off x="10715999" y="28534488"/>
+            <a:off x="10715999" y="34367073"/>
             <a:ext cx="8844000" cy="576000"/>
           </a:xfrm>
           <a:prstGeom prst="rect">
@@ -5077,14 +6051,14 @@
       </p:sp>
       <p:sp>
         <p:nvSpPr>
-          <p:cNvPr id="48" name="TextBox 47"/>
+          <p:cNvPr id="72" name="TextBox 71"/>
           <p:cNvSpPr txBox="1"/>
           <p:nvPr/>
         </p:nvSpPr>
         <p:spPr>
           <a:xfrm>
-            <a:off x="10895999" y="28570488"/>
-            <a:ext cx="5129519" cy="504000"/>
+            <a:off x="10895999" y="34403073"/>
+            <a:ext cx="5483280" cy="504000"/>
           </a:xfrm>
           <a:prstGeom prst="rect">
             <a:avLst/>
@@ -5116,14 +6090,14 @@
       </p:sp>
       <p:sp>
         <p:nvSpPr>
-          <p:cNvPr id="49" name="TextBox 48"/>
+          <p:cNvPr id="73" name="TextBox 72"/>
           <p:cNvSpPr txBox="1"/>
           <p:nvPr/>
         </p:nvSpPr>
         <p:spPr>
           <a:xfrm>
-            <a:off x="15845520" y="28570488"/>
-            <a:ext cx="3534480" cy="504000"/>
+            <a:off x="16199279" y="34403073"/>
+            <a:ext cx="3180719" cy="504000"/>
           </a:xfrm>
           <a:prstGeom prst="rect">
             <a:avLst/>
@@ -5144,7 +6118,7 @@
             <a:r>
               <a:rPr sz="2900" b="1">
                 <a:solidFill>
-                  <a:srgbClr val="009E73"/>
+                  <a:srgbClr val="5A636B"/>
                 </a:solidFill>
                 <a:latin typeface="Pretendard"/>
               </a:rPr>
@@ -5155,13 +6129,13 @@
       </p:sp>
       <p:sp>
         <p:nvSpPr>
-          <p:cNvPr id="50" name="TextBox 49"/>
+          <p:cNvPr id="74" name="TextBox 73"/>
           <p:cNvSpPr txBox="1"/>
           <p:nvPr/>
         </p:nvSpPr>
         <p:spPr>
           <a:xfrm>
-            <a:off x="10715999" y="29326488"/>
+            <a:off x="10715999" y="35159073"/>
             <a:ext cx="8844000" cy="1424635"/>
           </a:xfrm>
           <a:prstGeom prst="rect">
@@ -5187,16 +6161,34 @@
                 </a:solidFill>
                 <a:latin typeface="Pretendard"/>
               </a:rPr>
-              <a:t>프로토네이션이 왜 무효였는지까지 확인했다. </a:t>
+              <a:t>n=30 의 </a:t>
             </a:r>
             <a:r>
               <a:rPr sz="2500" b="1">
                 <a:solidFill>
+                  <a:srgbClr val="1A1A1A"/>
+                </a:solidFill>
+                <a:latin typeface="Pretendard"/>
+              </a:rPr>
+              <a:t>ρ = -0.538</a:t>
+            </a:r>
+            <a:r>
+              <a:rPr sz="2500" b="0">
+                <a:solidFill>
+                  <a:srgbClr val="1A1A1A"/>
+                </a:solidFill>
+                <a:latin typeface="Pretendard"/>
+              </a:rPr>
+              <a:t> 는 재현되지 않았다. 초안은 골격 교란 때문이라 적었으나 검정 결과 기각됐다. </a:t>
+            </a:r>
+            <a:r>
+              <a:rPr sz="2500" b="1">
+                <a:solidFill>
                   <a:srgbClr val="D55E00"/>
                 </a:solidFill>
                 <a:latin typeface="Pretendard"/>
               </a:rPr>
-              <a:t>기본 Vina 함수에는 정전기 항이 없다</a:t>
+              <a:t>위 두 검정은 C2 실패가 아니라 이 비재현을 대상으로 한 것</a:t>
             </a:r>
             <a:r>
               <a:rPr sz="2500" b="0">
@@ -5205,44 +6197,20 @@
                 </a:solidFill>
                 <a:latin typeface="Pretendard"/>
               </a:rPr>
-              <a:t> — 형식전하는 점수에 닿지 못하고, 바뀐 수소결합 타이핑도 그 질소가 결합 거리 밖이라 항 값이 움직이지 않았다.</a:t>
-            </a:r>
-          </a:p>
-        </p:txBody>
-      </p:sp>
-      <p:pic>
-        <p:nvPicPr>
-          <p:cNvPr id="51" name="Picture 50" descr="fig08_exhaustiveness.png"/>
-          <p:cNvPicPr>
-            <a:picLocks noChangeAspect="1"/>
-          </p:cNvPicPr>
-          <p:nvPr/>
-        </p:nvPicPr>
-        <p:blipFill>
-          <a:blip r:embed="rId5"/>
-          <a:stretch>
-            <a:fillRect/>
-          </a:stretch>
-        </p:blipFill>
-        <p:spPr>
-          <a:xfrm>
-            <a:off x="10715999" y="30967124"/>
-            <a:ext cx="8844000" cy="3239388"/>
-          </a:xfrm>
-          <a:prstGeom prst="rect">
-            <a:avLst/>
-          </a:prstGeom>
-        </p:spPr>
-      </p:pic>
-      <p:sp>
-        <p:nvSpPr>
-          <p:cNvPr id="52" name="Rectangle 51"/>
+              <a:t>이며, 4번 절의 두 검정과 하나로 세지 말아야 한다.</a:t>
+            </a:r>
+          </a:p>
+        </p:txBody>
+      </p:sp>
+      <p:sp>
+        <p:nvSpPr>
+          <p:cNvPr id="75" name="Rectangle 74"/>
           <p:cNvSpPr/>
           <p:nvPr/>
         </p:nvSpPr>
         <p:spPr>
           <a:xfrm>
-            <a:off x="20351999" y="18082007"/>
+            <a:off x="20351999" y="17810568"/>
             <a:ext cx="8844000" cy="612000"/>
           </a:xfrm>
           <a:prstGeom prst="rect">
@@ -5280,13 +6248,13 @@
       </p:sp>
       <p:sp>
         <p:nvSpPr>
-          <p:cNvPr id="53" name="TextBox 52"/>
+          <p:cNvPr id="76" name="TextBox 75"/>
           <p:cNvSpPr txBox="1"/>
           <p:nvPr/>
         </p:nvSpPr>
         <p:spPr>
           <a:xfrm>
-            <a:off x="20531999" y="18136007"/>
+            <a:off x="20531999" y="17864568"/>
             <a:ext cx="648000" cy="504000"/>
           </a:xfrm>
           <a:prstGeom prst="rect">
@@ -5312,20 +6280,20 @@
                 </a:solidFill>
                 <a:latin typeface="Pretendard"/>
               </a:rPr>
-              <a:t>5</a:t>
-            </a:r>
-          </a:p>
-        </p:txBody>
-      </p:sp>
-      <p:sp>
-        <p:nvSpPr>
-          <p:cNvPr id="54" name="TextBox 53"/>
+              <a:t>6</a:t>
+            </a:r>
+          </a:p>
+        </p:txBody>
+      </p:sp>
+      <p:sp>
+        <p:nvSpPr>
+          <p:cNvPr id="77" name="TextBox 76"/>
           <p:cNvSpPr txBox="1"/>
           <p:nvPr/>
         </p:nvSpPr>
         <p:spPr>
           <a:xfrm>
-            <a:off x="21287999" y="18136007"/>
+            <a:off x="21287999" y="17864568"/>
             <a:ext cx="7764000" cy="504000"/>
           </a:xfrm>
           <a:prstGeom prst="rect">
@@ -5358,7 +6326,7 @@
       </p:sp>
       <p:pic>
         <p:nvPicPr>
-          <p:cNvPr id="55" name="Picture 54" descr="fig05_forest.png"/>
+          <p:cNvPr id="78" name="Picture 77" descr="fig05_forest.png"/>
           <p:cNvPicPr>
             <a:picLocks noChangeAspect="1"/>
           </p:cNvPicPr>
@@ -5372,8 +6340,8 @@
         </p:blipFill>
         <p:spPr>
           <a:xfrm>
-            <a:off x="20351999" y="18910006"/>
-            <a:ext cx="8844000" cy="4852628"/>
+            <a:off x="20794199" y="18638568"/>
+            <a:ext cx="7959600" cy="4367365"/>
           </a:xfrm>
           <a:prstGeom prst="rect">
             <a:avLst/>
@@ -5382,13 +6350,13 @@
       </p:pic>
       <p:sp>
         <p:nvSpPr>
-          <p:cNvPr id="56" name="Rectangle 55"/>
+          <p:cNvPr id="79" name="Rectangle 78"/>
           <p:cNvSpPr/>
           <p:nvPr/>
         </p:nvSpPr>
         <p:spPr>
           <a:xfrm>
-            <a:off x="20351999" y="23942635"/>
+            <a:off x="20351999" y="23185933"/>
             <a:ext cx="8844000" cy="576000"/>
           </a:xfrm>
           <a:prstGeom prst="rect">
@@ -5426,13 +6394,13 @@
       </p:sp>
       <p:sp>
         <p:nvSpPr>
-          <p:cNvPr id="57" name="TextBox 56"/>
+          <p:cNvPr id="80" name="TextBox 79"/>
           <p:cNvSpPr txBox="1"/>
           <p:nvPr/>
         </p:nvSpPr>
         <p:spPr>
           <a:xfrm>
-            <a:off x="20531999" y="23978635"/>
+            <a:off x="20531999" y="23221933"/>
             <a:ext cx="5129519" cy="504000"/>
           </a:xfrm>
           <a:prstGeom prst="rect">
@@ -5465,13 +6433,13 @@
       </p:sp>
       <p:sp>
         <p:nvSpPr>
-          <p:cNvPr id="58" name="TextBox 57"/>
+          <p:cNvPr id="81" name="TextBox 80"/>
           <p:cNvSpPr txBox="1"/>
           <p:nvPr/>
         </p:nvSpPr>
         <p:spPr>
           <a:xfrm>
-            <a:off x="25481519" y="23978635"/>
+            <a:off x="25481519" y="23221933"/>
             <a:ext cx="3534480" cy="504000"/>
           </a:xfrm>
           <a:prstGeom prst="rect">
@@ -5504,13 +6472,13 @@
       </p:sp>
       <p:sp>
         <p:nvSpPr>
-          <p:cNvPr id="59" name="Rectangle 58"/>
+          <p:cNvPr id="82" name="Rectangle 81"/>
           <p:cNvSpPr/>
           <p:nvPr/>
         </p:nvSpPr>
         <p:spPr>
           <a:xfrm>
-            <a:off x="20351999" y="24518635"/>
+            <a:off x="20351999" y="23761933"/>
             <a:ext cx="8844000" cy="576000"/>
           </a:xfrm>
           <a:prstGeom prst="rect">
@@ -5548,13 +6516,13 @@
       </p:sp>
       <p:sp>
         <p:nvSpPr>
-          <p:cNvPr id="60" name="TextBox 59"/>
+          <p:cNvPr id="83" name="TextBox 82"/>
           <p:cNvSpPr txBox="1"/>
           <p:nvPr/>
         </p:nvSpPr>
         <p:spPr>
           <a:xfrm>
-            <a:off x="20531999" y="24554635"/>
+            <a:off x="20531999" y="23797933"/>
             <a:ext cx="5129519" cy="504000"/>
           </a:xfrm>
           <a:prstGeom prst="rect">
@@ -5587,13 +6555,13 @@
       </p:sp>
       <p:sp>
         <p:nvSpPr>
-          <p:cNvPr id="61" name="TextBox 60"/>
+          <p:cNvPr id="84" name="TextBox 83"/>
           <p:cNvSpPr txBox="1"/>
           <p:nvPr/>
         </p:nvSpPr>
         <p:spPr>
           <a:xfrm>
-            <a:off x="25481519" y="24554635"/>
+            <a:off x="25481519" y="23797933"/>
             <a:ext cx="3534480" cy="504000"/>
           </a:xfrm>
           <a:prstGeom prst="rect">
@@ -5626,13 +6594,13 @@
       </p:sp>
       <p:sp>
         <p:nvSpPr>
-          <p:cNvPr id="62" name="Rectangle 61"/>
+          <p:cNvPr id="85" name="Rectangle 84"/>
           <p:cNvSpPr/>
           <p:nvPr/>
         </p:nvSpPr>
         <p:spPr>
           <a:xfrm>
-            <a:off x="20351999" y="25094635"/>
+            <a:off x="20351999" y="24337933"/>
             <a:ext cx="8844000" cy="576000"/>
           </a:xfrm>
           <a:prstGeom prst="rect">
@@ -5670,13 +6638,13 @@
       </p:sp>
       <p:sp>
         <p:nvSpPr>
-          <p:cNvPr id="63" name="TextBox 62"/>
+          <p:cNvPr id="86" name="TextBox 85"/>
           <p:cNvSpPr txBox="1"/>
           <p:nvPr/>
         </p:nvSpPr>
         <p:spPr>
           <a:xfrm>
-            <a:off x="20531999" y="25130635"/>
+            <a:off x="20531999" y="24373933"/>
             <a:ext cx="5129519" cy="504000"/>
           </a:xfrm>
           <a:prstGeom prst="rect">
@@ -5709,13 +6677,13 @@
       </p:sp>
       <p:sp>
         <p:nvSpPr>
-          <p:cNvPr id="64" name="TextBox 63"/>
+          <p:cNvPr id="87" name="TextBox 86"/>
           <p:cNvSpPr txBox="1"/>
           <p:nvPr/>
         </p:nvSpPr>
         <p:spPr>
           <a:xfrm>
-            <a:off x="25481519" y="25130635"/>
+            <a:off x="25481519" y="24373933"/>
             <a:ext cx="3534480" cy="504000"/>
           </a:xfrm>
           <a:prstGeom prst="rect">
@@ -5748,13 +6716,13 @@
       </p:sp>
       <p:sp>
         <p:nvSpPr>
-          <p:cNvPr id="65" name="Rectangle 64"/>
+          <p:cNvPr id="88" name="Rectangle 87"/>
           <p:cNvSpPr/>
           <p:nvPr/>
         </p:nvSpPr>
         <p:spPr>
           <a:xfrm>
-            <a:off x="20351999" y="25670635"/>
+            <a:off x="20351999" y="24913933"/>
             <a:ext cx="8844000" cy="576000"/>
           </a:xfrm>
           <a:prstGeom prst="rect">
@@ -5792,13 +6760,13 @@
       </p:sp>
       <p:sp>
         <p:nvSpPr>
-          <p:cNvPr id="66" name="TextBox 65"/>
+          <p:cNvPr id="89" name="TextBox 88"/>
           <p:cNvSpPr txBox="1"/>
           <p:nvPr/>
         </p:nvSpPr>
         <p:spPr>
           <a:xfrm>
-            <a:off x="20531999" y="25706635"/>
+            <a:off x="20531999" y="24949933"/>
             <a:ext cx="5129519" cy="504000"/>
           </a:xfrm>
           <a:prstGeom prst="rect">
@@ -5831,13 +6799,13 @@
       </p:sp>
       <p:sp>
         <p:nvSpPr>
-          <p:cNvPr id="67" name="TextBox 66"/>
+          <p:cNvPr id="90" name="TextBox 89"/>
           <p:cNvSpPr txBox="1"/>
           <p:nvPr/>
         </p:nvSpPr>
         <p:spPr>
           <a:xfrm>
-            <a:off x="25481519" y="25706635"/>
+            <a:off x="25481519" y="24949933"/>
             <a:ext cx="3534480" cy="504000"/>
           </a:xfrm>
           <a:prstGeom prst="rect">
@@ -5870,13 +6838,249 @@
       </p:sp>
       <p:sp>
         <p:nvSpPr>
-          <p:cNvPr id="68" name="Rectangle 67"/>
+          <p:cNvPr id="91" name="TextBox 90"/>
+          <p:cNvSpPr txBox="1"/>
+          <p:nvPr/>
+        </p:nvSpPr>
+        <p:spPr>
+          <a:xfrm>
+            <a:off x="20351999" y="25705933"/>
+            <a:ext cx="8844000" cy="973756"/>
+          </a:xfrm>
+          <a:prstGeom prst="rect">
+            <a:avLst/>
+          </a:prstGeom>
+          <a:noFill/>
+        </p:spPr>
+        <p:txBody>
+          <a:bodyPr wrap="square" anchor="t" lIns="54000" rIns="54000" tIns="0" bIns="0">
+            <a:spAutoFit/>
+          </a:bodyPr>
+          <a:lstStyle/>
+          <a:p>
+            <a:pPr algn="l">
+              <a:spcAft>
+                <a:spcPts val="0"/>
+              </a:spcAft>
+            </a:pPr>
+            <a:r>
+              <a:rPr sz="2100" b="0">
+                <a:solidFill>
+                  <a:srgbClr val="5A636B"/>
+                </a:solidFill>
+                <a:latin typeface="Pretendard"/>
+              </a:rPr>
+              <a:t>위 넷은 모두 상관·Q² 값이다. </a:t>
+            </a:r>
+            <a:r>
+              <a:rPr sz="2500" b="1">
+                <a:solidFill>
+                  <a:srgbClr val="D55E00"/>
+                </a:solidFill>
+                <a:latin typeface="Pretendard"/>
+              </a:rPr>
+              <a:t>순열 검정 p = 0.31878</a:t>
+            </a:r>
+            <a:r>
+              <a:rPr sz="2100" b="0">
+                <a:solidFill>
+                  <a:srgbClr val="5A636B"/>
+                </a:solidFill>
+                <a:latin typeface="Pretendard"/>
+              </a:rPr>
+              <a:t> 로 유의하지 않다.</a:t>
+            </a:r>
+          </a:p>
+        </p:txBody>
+      </p:sp>
+      <p:sp>
+        <p:nvSpPr>
+          <p:cNvPr id="92" name="TextBox 91"/>
+          <p:cNvSpPr txBox="1"/>
+          <p:nvPr/>
+        </p:nvSpPr>
+        <p:spPr>
+          <a:xfrm>
+            <a:off x="20351999" y="26823689"/>
+            <a:ext cx="8844000" cy="1424635"/>
+          </a:xfrm>
+          <a:prstGeom prst="rect">
+            <a:avLst/>
+          </a:prstGeom>
+          <a:noFill/>
+        </p:spPr>
+        <p:txBody>
+          <a:bodyPr wrap="square" anchor="t" lIns="54000" rIns="54000" tIns="0" bIns="0">
+            <a:spAutoFit/>
+          </a:bodyPr>
+          <a:lstStyle/>
+          <a:p>
+            <a:pPr algn="l">
+              <a:spcAft>
+                <a:spcPts val="0"/>
+              </a:spcAft>
+            </a:pPr>
+            <a:r>
+              <a:rPr sz="2500" b="0">
+                <a:solidFill>
+                  <a:srgbClr val="1A1A1A"/>
+                </a:solidFill>
+                <a:latin typeface="Pretendard"/>
+              </a:rPr>
+              <a:t>near 대역만 유의하다 (ρ = -0.397, p = 0.00365). </a:t>
+            </a:r>
+            <a:r>
+              <a:rPr sz="2500" b="1">
+                <a:solidFill>
+                  <a:srgbClr val="D55E00"/>
+                </a:solidFill>
+                <a:latin typeface="Pretendard"/>
+              </a:rPr>
+              <a:t>가설로만 남긴다</a:t>
+            </a:r>
+            <a:r>
+              <a:rPr sz="2500" b="0">
+                <a:solidFill>
+                  <a:srgbClr val="1A1A1A"/>
+                </a:solidFill>
+                <a:latin typeface="Pretendard"/>
+              </a:rPr>
+              <a:t> — AUC 신뢰구간 [0.64, 0.95] 이 기준 0.7 을 포함하고, 전수 칸을 빼면 -0.219 로 떨어진다.</a:t>
+            </a:r>
+          </a:p>
+        </p:txBody>
+      </p:sp>
+      <p:sp>
+        <p:nvSpPr>
+          <p:cNvPr id="93" name="Rectangle 92"/>
           <p:cNvSpPr/>
           <p:nvPr/>
         </p:nvSpPr>
         <p:spPr>
           <a:xfrm>
-            <a:off x="20351999" y="26246635"/>
+            <a:off x="20351999" y="28392325"/>
+            <a:ext cx="8844000" cy="612000"/>
+          </a:xfrm>
+          <a:prstGeom prst="rect">
+            <a:avLst/>
+          </a:prstGeom>
+          <a:solidFill>
+            <a:srgbClr val="D55E00"/>
+          </a:solidFill>
+          <a:ln>
+            <a:noFill/>
+          </a:ln>
+          <a:effectLst/>
+        </p:spPr>
+        <p:style>
+          <a:lnRef idx="1">
+            <a:schemeClr val="accent1"/>
+          </a:lnRef>
+          <a:fillRef idx="3">
+            <a:schemeClr val="accent1"/>
+          </a:fillRef>
+          <a:effectRef idx="2">
+            <a:schemeClr val="accent1"/>
+          </a:effectRef>
+          <a:fontRef idx="minor">
+            <a:schemeClr val="lt1"/>
+          </a:fontRef>
+        </p:style>
+        <p:txBody>
+          <a:bodyPr rtlCol="0" anchor="ctr"/>
+          <a:lstStyle/>
+          <a:p>
+            <a:pPr algn="ctr"/>
+          </a:p>
+        </p:txBody>
+      </p:sp>
+      <p:sp>
+        <p:nvSpPr>
+          <p:cNvPr id="94" name="TextBox 93"/>
+          <p:cNvSpPr txBox="1"/>
+          <p:nvPr/>
+        </p:nvSpPr>
+        <p:spPr>
+          <a:xfrm>
+            <a:off x="20531999" y="28446325"/>
+            <a:ext cx="648000" cy="504000"/>
+          </a:xfrm>
+          <a:prstGeom prst="rect">
+            <a:avLst/>
+          </a:prstGeom>
+          <a:noFill/>
+        </p:spPr>
+        <p:txBody>
+          <a:bodyPr wrap="square" anchor="ctr" lIns="54000" rIns="54000" tIns="0" bIns="0">
+            <a:spAutoFit/>
+          </a:bodyPr>
+          <a:lstStyle/>
+          <a:p>
+            <a:pPr algn="l">
+              <a:spcAft>
+                <a:spcPts val="0"/>
+              </a:spcAft>
+            </a:pPr>
+            <a:r>
+              <a:rPr sz="3200" b="1">
+                <a:solidFill>
+                  <a:srgbClr val="FFFFFF"/>
+                </a:solidFill>
+                <a:latin typeface="Pretendard"/>
+              </a:rPr>
+              <a:t>6b</a:t>
+            </a:r>
+          </a:p>
+        </p:txBody>
+      </p:sp>
+      <p:sp>
+        <p:nvSpPr>
+          <p:cNvPr id="95" name="TextBox 94"/>
+          <p:cNvSpPr txBox="1"/>
+          <p:nvPr/>
+        </p:nvSpPr>
+        <p:spPr>
+          <a:xfrm>
+            <a:off x="21287999" y="28446325"/>
+            <a:ext cx="7764000" cy="504000"/>
+          </a:xfrm>
+          <a:prstGeom prst="rect">
+            <a:avLst/>
+          </a:prstGeom>
+          <a:noFill/>
+        </p:spPr>
+        <p:txBody>
+          <a:bodyPr wrap="square" anchor="ctr" lIns="54000" rIns="54000" tIns="0" bIns="0">
+            <a:spAutoFit/>
+          </a:bodyPr>
+          <a:lstStyle/>
+          <a:p>
+            <a:pPr algn="l">
+              <a:spcAft>
+                <a:spcPts val="0"/>
+              </a:spcAft>
+            </a:pPr>
+            <a:r>
+              <a:rPr sz="3200" b="1">
+                <a:solidFill>
+                  <a:srgbClr val="FFFFFF"/>
+                </a:solidFill>
+                <a:latin typeface="Pretendard"/>
+              </a:rPr>
+              <a:t>해석의 상한 — 자세 타당도</a:t>
+            </a:r>
+          </a:p>
+        </p:txBody>
+      </p:sp>
+      <p:sp>
+        <p:nvSpPr>
+          <p:cNvPr id="96" name="Rectangle 95"/>
+          <p:cNvSpPr/>
+          <p:nvPr/>
+        </p:nvSpPr>
+        <p:spPr>
+          <a:xfrm>
+            <a:off x="20351999" y="29220325"/>
             <a:ext cx="8844000" cy="576000"/>
           </a:xfrm>
           <a:prstGeom prst="rect">
@@ -5914,14 +7118,14 @@
       </p:sp>
       <p:sp>
         <p:nvSpPr>
-          <p:cNvPr id="69" name="TextBox 68"/>
+          <p:cNvPr id="97" name="TextBox 96"/>
           <p:cNvSpPr txBox="1"/>
           <p:nvPr/>
         </p:nvSpPr>
         <p:spPr>
           <a:xfrm>
-            <a:off x="20531999" y="26282635"/>
-            <a:ext cx="5129519" cy="504000"/>
+            <a:off x="20531999" y="29256325"/>
+            <a:ext cx="5483280" cy="504000"/>
           </a:xfrm>
           <a:prstGeom prst="rect">
             <a:avLst/>
@@ -5946,21 +7150,21 @@
                 </a:solidFill>
                 <a:latin typeface="Pretendard"/>
               </a:rPr>
-              <a:t>순열 검정 p</a:t>
-            </a:r>
-          </a:p>
-        </p:txBody>
-      </p:sp>
-      <p:sp>
-        <p:nvSpPr>
-          <p:cNvPr id="70" name="TextBox 69"/>
+              <a:t>1위 자세 MCS-RMSD 중앙값</a:t>
+            </a:r>
+          </a:p>
+        </p:txBody>
+      </p:sp>
+      <p:sp>
+        <p:nvSpPr>
+          <p:cNvPr id="98" name="TextBox 97"/>
           <p:cNvSpPr txBox="1"/>
           <p:nvPr/>
         </p:nvSpPr>
         <p:spPr>
           <a:xfrm>
-            <a:off x="25481519" y="26282635"/>
-            <a:ext cx="3534480" cy="504000"/>
+            <a:off x="25835279" y="29256325"/>
+            <a:ext cx="3180719" cy="504000"/>
           </a:xfrm>
           <a:prstGeom prst="rect">
             <a:avLst/>
@@ -5985,84 +7189,27 @@
                 </a:solidFill>
                 <a:latin typeface="Pretendard"/>
               </a:rPr>
-              <a:t>0.31878</a:t>
-            </a:r>
-          </a:p>
-        </p:txBody>
-      </p:sp>
-      <p:sp>
-        <p:nvSpPr>
-          <p:cNvPr id="71" name="TextBox 70"/>
-          <p:cNvSpPr txBox="1"/>
-          <p:nvPr/>
-        </p:nvSpPr>
-        <p:spPr>
-          <a:xfrm>
-            <a:off x="20351999" y="27038635"/>
-            <a:ext cx="8844000" cy="1875513"/>
-          </a:xfrm>
-          <a:prstGeom prst="rect">
-            <a:avLst/>
-          </a:prstGeom>
-          <a:noFill/>
-        </p:spPr>
-        <p:txBody>
-          <a:bodyPr wrap="square" anchor="t" lIns="54000" rIns="54000" tIns="0" bIns="0">
-            <a:spAutoFit/>
-          </a:bodyPr>
-          <a:lstStyle/>
-          <a:p>
-            <a:pPr algn="l">
-              <a:spcAft>
-                <a:spcPts val="0"/>
-              </a:spcAft>
-            </a:pPr>
-            <a:r>
-              <a:rPr sz="2500" b="0">
-                <a:solidFill>
-                  <a:srgbClr val="1A1A1A"/>
-                </a:solidFill>
-                <a:latin typeface="Pretendard"/>
-              </a:rPr>
-              <a:t>near 대역만 유의하다 (ρ = -0.397, p = 0.00365). </a:t>
-            </a:r>
-            <a:r>
-              <a:rPr sz="2500" b="1">
-                <a:solidFill>
-                  <a:srgbClr val="D55E00"/>
-                </a:solidFill>
-                <a:latin typeface="Pretendard"/>
-              </a:rPr>
-              <a:t>그러나 가설로만 남긴다</a:t>
-            </a:r>
-            <a:r>
-              <a:rPr sz="2500" b="0">
-                <a:solidFill>
-                  <a:srgbClr val="1A1A1A"/>
-                </a:solidFill>
-                <a:latin typeface="Pretendard"/>
-              </a:rPr>
-              <a:t> — AUC 0.792 의 신뢰구간 [0.64, 0.95] 이 기준 0.7 을 포함하고, 전수(census)인 약함 칸을 빼면 상관이 -0.219 로 떨어진다.</a:t>
-            </a:r>
-          </a:p>
-        </p:txBody>
-      </p:sp>
-      <p:sp>
-        <p:nvSpPr>
-          <p:cNvPr id="72" name="Rectangle 71"/>
+              <a:t>4.50 Å</a:t>
+            </a:r>
+          </a:p>
+        </p:txBody>
+      </p:sp>
+      <p:sp>
+        <p:nvSpPr>
+          <p:cNvPr id="99" name="Rectangle 98"/>
           <p:cNvSpPr/>
           <p:nvPr/>
         </p:nvSpPr>
         <p:spPr>
           <a:xfrm>
-            <a:off x="20351999" y="29130148"/>
-            <a:ext cx="8844000" cy="612000"/>
+            <a:off x="20351999" y="29796325"/>
+            <a:ext cx="8844000" cy="576000"/>
           </a:xfrm>
           <a:prstGeom prst="rect">
             <a:avLst/>
           </a:prstGeom>
           <a:solidFill>
-            <a:srgbClr val="D55E00"/>
+            <a:srgbClr val="FFFFFF"/>
           </a:solidFill>
           <a:ln>
             <a:noFill/>
@@ -6093,14 +7240,14 @@
       </p:sp>
       <p:sp>
         <p:nvSpPr>
-          <p:cNvPr id="73" name="TextBox 72"/>
+          <p:cNvPr id="100" name="TextBox 99"/>
           <p:cNvSpPr txBox="1"/>
           <p:nvPr/>
         </p:nvSpPr>
         <p:spPr>
           <a:xfrm>
-            <a:off x="20531999" y="29184148"/>
-            <a:ext cx="648000" cy="504000"/>
+            <a:off x="20531999" y="29832325"/>
+            <a:ext cx="5483280" cy="504000"/>
           </a:xfrm>
           <a:prstGeom prst="rect">
             <a:avLst/>
@@ -6119,27 +7266,27 @@
               </a:spcAft>
             </a:pPr>
             <a:r>
-              <a:rPr sz="3200" b="1">
-                <a:solidFill>
-                  <a:srgbClr val="FFFFFF"/>
-                </a:solidFill>
-                <a:latin typeface="Pretendard"/>
-              </a:rPr>
-              <a:t>6</a:t>
-            </a:r>
-          </a:p>
-        </p:txBody>
-      </p:sp>
-      <p:sp>
-        <p:nvSpPr>
-          <p:cNvPr id="74" name="TextBox 73"/>
+              <a:rPr sz="2400" b="0">
+                <a:solidFill>
+                  <a:srgbClr val="1A1A1A"/>
+                </a:solidFill>
+                <a:latin typeface="Pretendard"/>
+              </a:rPr>
+              <a:t>2 Å 기준 통과 (전체)</a:t>
+            </a:r>
+          </a:p>
+        </p:txBody>
+      </p:sp>
+      <p:sp>
+        <p:nvSpPr>
+          <p:cNvPr id="101" name="TextBox 100"/>
           <p:cNvSpPr txBox="1"/>
           <p:nvPr/>
         </p:nvSpPr>
         <p:spPr>
           <a:xfrm>
-            <a:off x="21287999" y="29184148"/>
-            <a:ext cx="7764000" cy="504000"/>
+            <a:off x="25835279" y="29832325"/>
+            <a:ext cx="3180719" cy="504000"/>
           </a:xfrm>
           <a:prstGeom prst="rect">
             <a:avLst/>
@@ -6152,32 +7299,32 @@
           </a:bodyPr>
           <a:lstStyle/>
           <a:p>
-            <a:pPr algn="l">
+            <a:pPr algn="r">
               <a:spcAft>
                 <a:spcPts val="0"/>
               </a:spcAft>
             </a:pPr>
             <a:r>
-              <a:rPr sz="3200" b="1">
-                <a:solidFill>
-                  <a:srgbClr val="FFFFFF"/>
-                </a:solidFill>
-                <a:latin typeface="Pretendard"/>
-              </a:rPr>
-              <a:t>해석의 상한 — 자세 타당도</a:t>
-            </a:r>
-          </a:p>
-        </p:txBody>
-      </p:sp>
-      <p:sp>
-        <p:nvSpPr>
-          <p:cNvPr id="75" name="Rectangle 74"/>
+              <a:rPr sz="2900" b="1">
+                <a:solidFill>
+                  <a:srgbClr val="D55E00"/>
+                </a:solidFill>
+                <a:latin typeface="Pretendard"/>
+              </a:rPr>
+              <a:t>19.0%</a:t>
+            </a:r>
+          </a:p>
+        </p:txBody>
+      </p:sp>
+      <p:sp>
+        <p:nvSpPr>
+          <p:cNvPr id="102" name="Rectangle 101"/>
           <p:cNvSpPr/>
           <p:nvPr/>
         </p:nvSpPr>
         <p:spPr>
           <a:xfrm>
-            <a:off x="20351999" y="29958148"/>
+            <a:off x="20351999" y="30372325"/>
             <a:ext cx="8844000" cy="576000"/>
           </a:xfrm>
           <a:prstGeom prst="rect">
@@ -6215,13 +7362,13 @@
       </p:sp>
       <p:sp>
         <p:nvSpPr>
-          <p:cNvPr id="76" name="TextBox 75"/>
+          <p:cNvPr id="103" name="TextBox 102"/>
           <p:cNvSpPr txBox="1"/>
           <p:nvPr/>
         </p:nvSpPr>
         <p:spPr>
           <a:xfrm>
-            <a:off x="20531999" y="29994148"/>
+            <a:off x="20531999" y="30408325"/>
             <a:ext cx="5483280" cy="504000"/>
           </a:xfrm>
           <a:prstGeom prst="rect">
@@ -6247,20 +7394,20 @@
                 </a:solidFill>
                 <a:latin typeface="Pretendard"/>
               </a:rPr>
-              <a:t>1위 자세 MCS-RMSD 중앙값</a:t>
-            </a:r>
-          </a:p>
-        </p:txBody>
-      </p:sp>
-      <p:sp>
-        <p:nvSpPr>
-          <p:cNvPr id="77" name="TextBox 76"/>
+              <a:t>far 대역 통과율</a:t>
+            </a:r>
+          </a:p>
+        </p:txBody>
+      </p:sp>
+      <p:sp>
+        <p:nvSpPr>
+          <p:cNvPr id="104" name="TextBox 103"/>
           <p:cNvSpPr txBox="1"/>
           <p:nvPr/>
         </p:nvSpPr>
         <p:spPr>
           <a:xfrm>
-            <a:off x="25835279" y="29994148"/>
+            <a:off x="25835279" y="30408325"/>
             <a:ext cx="3180719" cy="504000"/>
           </a:xfrm>
           <a:prstGeom prst="rect">
@@ -6286,265 +7433,21 @@
                 </a:solidFill>
                 <a:latin typeface="Pretendard"/>
               </a:rPr>
-              <a:t>4.50 Å</a:t>
-            </a:r>
-          </a:p>
-        </p:txBody>
-      </p:sp>
-      <p:sp>
-        <p:nvSpPr>
-          <p:cNvPr id="78" name="Rectangle 77"/>
-          <p:cNvSpPr/>
-          <p:nvPr/>
-        </p:nvSpPr>
-        <p:spPr>
-          <a:xfrm>
-            <a:off x="20351999" y="30534148"/>
-            <a:ext cx="8844000" cy="576000"/>
-          </a:xfrm>
-          <a:prstGeom prst="rect">
-            <a:avLst/>
-          </a:prstGeom>
-          <a:solidFill>
-            <a:srgbClr val="FFFFFF"/>
-          </a:solidFill>
-          <a:ln>
-            <a:noFill/>
-          </a:ln>
-          <a:effectLst/>
-        </p:spPr>
-        <p:style>
-          <a:lnRef idx="1">
-            <a:schemeClr val="accent1"/>
-          </a:lnRef>
-          <a:fillRef idx="3">
-            <a:schemeClr val="accent1"/>
-          </a:fillRef>
-          <a:effectRef idx="2">
-            <a:schemeClr val="accent1"/>
-          </a:effectRef>
-          <a:fontRef idx="minor">
-            <a:schemeClr val="lt1"/>
-          </a:fontRef>
-        </p:style>
-        <p:txBody>
-          <a:bodyPr rtlCol="0" anchor="ctr"/>
-          <a:lstStyle/>
-          <a:p>
-            <a:pPr algn="ctr"/>
-          </a:p>
-        </p:txBody>
-      </p:sp>
-      <p:sp>
-        <p:nvSpPr>
-          <p:cNvPr id="79" name="TextBox 78"/>
+              <a:t>1.8%</a:t>
+            </a:r>
+          </a:p>
+        </p:txBody>
+      </p:sp>
+      <p:sp>
+        <p:nvSpPr>
+          <p:cNvPr id="105" name="TextBox 104"/>
           <p:cNvSpPr txBox="1"/>
           <p:nvPr/>
         </p:nvSpPr>
         <p:spPr>
           <a:xfrm>
-            <a:off x="20531999" y="30570148"/>
-            <a:ext cx="5483280" cy="504000"/>
-          </a:xfrm>
-          <a:prstGeom prst="rect">
-            <a:avLst/>
-          </a:prstGeom>
-          <a:noFill/>
-        </p:spPr>
-        <p:txBody>
-          <a:bodyPr wrap="square" anchor="ctr" lIns="54000" rIns="54000" tIns="0" bIns="0">
-            <a:spAutoFit/>
-          </a:bodyPr>
-          <a:lstStyle/>
-          <a:p>
-            <a:pPr algn="l">
-              <a:spcAft>
-                <a:spcPts val="0"/>
-              </a:spcAft>
-            </a:pPr>
-            <a:r>
-              <a:rPr sz="2400" b="0">
-                <a:solidFill>
-                  <a:srgbClr val="1A1A1A"/>
-                </a:solidFill>
-                <a:latin typeface="Pretendard"/>
-              </a:rPr>
-              <a:t>2 Å 기준 통과 (전체)</a:t>
-            </a:r>
-          </a:p>
-        </p:txBody>
-      </p:sp>
-      <p:sp>
-        <p:nvSpPr>
-          <p:cNvPr id="80" name="TextBox 79"/>
-          <p:cNvSpPr txBox="1"/>
-          <p:nvPr/>
-        </p:nvSpPr>
-        <p:spPr>
-          <a:xfrm>
-            <a:off x="25835279" y="30570148"/>
-            <a:ext cx="3180719" cy="504000"/>
-          </a:xfrm>
-          <a:prstGeom prst="rect">
-            <a:avLst/>
-          </a:prstGeom>
-          <a:noFill/>
-        </p:spPr>
-        <p:txBody>
-          <a:bodyPr wrap="square" anchor="ctr" lIns="54000" rIns="54000" tIns="0" bIns="0">
-            <a:spAutoFit/>
-          </a:bodyPr>
-          <a:lstStyle/>
-          <a:p>
-            <a:pPr algn="r">
-              <a:spcAft>
-                <a:spcPts val="0"/>
-              </a:spcAft>
-            </a:pPr>
-            <a:r>
-              <a:rPr sz="2900" b="1">
-                <a:solidFill>
-                  <a:srgbClr val="D55E00"/>
-                </a:solidFill>
-                <a:latin typeface="Pretendard"/>
-              </a:rPr>
-              <a:t>19.0%</a:t>
-            </a:r>
-          </a:p>
-        </p:txBody>
-      </p:sp>
-      <p:sp>
-        <p:nvSpPr>
-          <p:cNvPr id="81" name="Rectangle 80"/>
-          <p:cNvSpPr/>
-          <p:nvPr/>
-        </p:nvSpPr>
-        <p:spPr>
-          <a:xfrm>
-            <a:off x="20351999" y="31110148"/>
-            <a:ext cx="8844000" cy="576000"/>
-          </a:xfrm>
-          <a:prstGeom prst="rect">
-            <a:avLst/>
-          </a:prstGeom>
-          <a:solidFill>
-            <a:srgbClr val="F2F4F6"/>
-          </a:solidFill>
-          <a:ln>
-            <a:noFill/>
-          </a:ln>
-          <a:effectLst/>
-        </p:spPr>
-        <p:style>
-          <a:lnRef idx="1">
-            <a:schemeClr val="accent1"/>
-          </a:lnRef>
-          <a:fillRef idx="3">
-            <a:schemeClr val="accent1"/>
-          </a:fillRef>
-          <a:effectRef idx="2">
-            <a:schemeClr val="accent1"/>
-          </a:effectRef>
-          <a:fontRef idx="minor">
-            <a:schemeClr val="lt1"/>
-          </a:fontRef>
-        </p:style>
-        <p:txBody>
-          <a:bodyPr rtlCol="0" anchor="ctr"/>
-          <a:lstStyle/>
-          <a:p>
-            <a:pPr algn="ctr"/>
-          </a:p>
-        </p:txBody>
-      </p:sp>
-      <p:sp>
-        <p:nvSpPr>
-          <p:cNvPr id="82" name="TextBox 81"/>
-          <p:cNvSpPr txBox="1"/>
-          <p:nvPr/>
-        </p:nvSpPr>
-        <p:spPr>
-          <a:xfrm>
-            <a:off x="20531999" y="31146148"/>
-            <a:ext cx="5483280" cy="504000"/>
-          </a:xfrm>
-          <a:prstGeom prst="rect">
-            <a:avLst/>
-          </a:prstGeom>
-          <a:noFill/>
-        </p:spPr>
-        <p:txBody>
-          <a:bodyPr wrap="square" anchor="ctr" lIns="54000" rIns="54000" tIns="0" bIns="0">
-            <a:spAutoFit/>
-          </a:bodyPr>
-          <a:lstStyle/>
-          <a:p>
-            <a:pPr algn="l">
-              <a:spcAft>
-                <a:spcPts val="0"/>
-              </a:spcAft>
-            </a:pPr>
-            <a:r>
-              <a:rPr sz="2400" b="0">
-                <a:solidFill>
-                  <a:srgbClr val="1A1A1A"/>
-                </a:solidFill>
-                <a:latin typeface="Pretendard"/>
-              </a:rPr>
-              <a:t>far 대역 통과율</a:t>
-            </a:r>
-          </a:p>
-        </p:txBody>
-      </p:sp>
-      <p:sp>
-        <p:nvSpPr>
-          <p:cNvPr id="83" name="TextBox 82"/>
-          <p:cNvSpPr txBox="1"/>
-          <p:nvPr/>
-        </p:nvSpPr>
-        <p:spPr>
-          <a:xfrm>
-            <a:off x="25835279" y="31146148"/>
-            <a:ext cx="3180719" cy="504000"/>
-          </a:xfrm>
-          <a:prstGeom prst="rect">
-            <a:avLst/>
-          </a:prstGeom>
-          <a:noFill/>
-        </p:spPr>
-        <p:txBody>
-          <a:bodyPr wrap="square" anchor="ctr" lIns="54000" rIns="54000" tIns="0" bIns="0">
-            <a:spAutoFit/>
-          </a:bodyPr>
-          <a:lstStyle/>
-          <a:p>
-            <a:pPr algn="r">
-              <a:spcAft>
-                <a:spcPts val="0"/>
-              </a:spcAft>
-            </a:pPr>
-            <a:r>
-              <a:rPr sz="2900" b="1">
-                <a:solidFill>
-                  <a:srgbClr val="D55E00"/>
-                </a:solidFill>
-                <a:latin typeface="Pretendard"/>
-              </a:rPr>
-              <a:t>1.8%</a:t>
-            </a:r>
-          </a:p>
-        </p:txBody>
-      </p:sp>
-      <p:sp>
-        <p:nvSpPr>
-          <p:cNvPr id="84" name="TextBox 83"/>
-          <p:cNvSpPr txBox="1"/>
-          <p:nvPr/>
-        </p:nvSpPr>
-        <p:spPr>
-          <a:xfrm>
-            <a:off x="20351999" y="31902148"/>
-            <a:ext cx="8844000" cy="1424635"/>
+            <a:off x="20351999" y="31164325"/>
+            <a:ext cx="8844000" cy="973756"/>
           </a:xfrm>
           <a:prstGeom prst="rect">
             <a:avLst/>
@@ -6569,20 +7472,20 @@
                 </a:solidFill>
                 <a:latin typeface="Pretendard"/>
               </a:rPr>
-              <a:t>점수를 매긴 자세의 81% 가 C2 를 실패시킨 것과 같은 기준 밖이다. “신호 없음” 은 대부분 틀린 자세에 매긴 점수에 대한 진술이며, 이것이 모든 상관 해석의 상한을 정한다.</a:t>
-            </a:r>
-          </a:p>
-        </p:txBody>
-      </p:sp>
-      <p:sp>
-        <p:nvSpPr>
-          <p:cNvPr id="85" name="Rectangle 84"/>
+              <a:t>점수를 매긴 자세의 81% 가 C2 를 실패시킨 것과 같은 기준 밖이다 — 이것이 모든 상관 해석의 상한이다.</a:t>
+            </a:r>
+          </a:p>
+        </p:txBody>
+      </p:sp>
+      <p:sp>
+        <p:nvSpPr>
+          <p:cNvPr id="106" name="Rectangle 105"/>
           <p:cNvSpPr/>
           <p:nvPr/>
         </p:nvSpPr>
         <p:spPr>
           <a:xfrm>
-            <a:off x="20351999" y="33542783"/>
+            <a:off x="20351999" y="32282081"/>
             <a:ext cx="8844000" cy="612000"/>
           </a:xfrm>
           <a:prstGeom prst="rect">
@@ -6620,13 +7523,13 @@
       </p:sp>
       <p:sp>
         <p:nvSpPr>
-          <p:cNvPr id="86" name="TextBox 85"/>
+          <p:cNvPr id="107" name="TextBox 106"/>
           <p:cNvSpPr txBox="1"/>
           <p:nvPr/>
         </p:nvSpPr>
         <p:spPr>
           <a:xfrm>
-            <a:off x="20531999" y="33596783"/>
+            <a:off x="20531999" y="32336081"/>
             <a:ext cx="648000" cy="504000"/>
           </a:xfrm>
           <a:prstGeom prst="rect">
@@ -6659,13 +7562,13 @@
       </p:sp>
       <p:sp>
         <p:nvSpPr>
-          <p:cNvPr id="87" name="TextBox 86"/>
+          <p:cNvPr id="108" name="TextBox 107"/>
           <p:cNvSpPr txBox="1"/>
           <p:nvPr/>
         </p:nvSpPr>
         <p:spPr>
           <a:xfrm>
-            <a:off x="21287999" y="33596783"/>
+            <a:off x="21287999" y="32336081"/>
             <a:ext cx="7764000" cy="504000"/>
           </a:xfrm>
           <a:prstGeom prst="rect">
@@ -6698,14 +7601,14 @@
       </p:sp>
       <p:sp>
         <p:nvSpPr>
-          <p:cNvPr id="88" name="Rounded Rectangle 87"/>
+          <p:cNvPr id="109" name="Rounded Rectangle 108"/>
           <p:cNvSpPr/>
           <p:nvPr/>
         </p:nvSpPr>
         <p:spPr>
           <a:xfrm>
-            <a:off x="20351999" y="34370783"/>
-            <a:ext cx="8844000" cy="5754510"/>
+            <a:off x="20351999" y="33110081"/>
+            <a:ext cx="8844000" cy="7778510"/>
           </a:xfrm>
           <a:prstGeom prst="roundRect">
             <a:avLst/>
@@ -6744,14 +7647,14 @@
       </p:sp>
       <p:sp>
         <p:nvSpPr>
-          <p:cNvPr id="89" name="TextBox 88"/>
+          <p:cNvPr id="110" name="TextBox 109"/>
           <p:cNvSpPr txBox="1"/>
           <p:nvPr/>
         </p:nvSpPr>
         <p:spPr>
           <a:xfrm>
-            <a:off x="20567999" y="34586783"/>
-            <a:ext cx="8412000" cy="5322510"/>
+            <a:off x="20567999" y="33326081"/>
+            <a:ext cx="8412000" cy="7346510"/>
           </a:xfrm>
           <a:prstGeom prst="rect">
             <a:avLst/>
@@ -6810,7 +7713,7 @@
                 </a:solidFill>
                 <a:latin typeface="Pretendard"/>
               </a:rPr>
-              <a:t> 한 대역에서만 신호가 있고 그 신호는 전수 칸 하나에 얹혀 있다.</a:t>
+              <a:t> 한 대역의 신호는 전수 칸 하나에 얹혀 있다.</a:t>
             </a:r>
           </a:p>
           <a:p>
@@ -6826,7 +7729,7 @@
                 </a:solidFill>
                 <a:latin typeface="Pretendard"/>
               </a:rPr>
-              <a:t>· 네 후보를 실험으로 제거했다.</a:t>
+              <a:t>· 두 갈래에서 각각 두 후보씩 제거했다.</a:t>
             </a:r>
             <a:r>
               <a:rPr sz="2500" b="0">
@@ -6835,7 +7738,7 @@
                 </a:solidFill>
                 <a:latin typeface="Pretendard"/>
               </a:rPr>
-              <a:t> 남은 것은 물 제거·강체 수용체·단일 배좌·holo 편향·채점 함수 자체다.</a:t>
+              <a:t> C2 실패는 탐색 깊이·프로토네이션, 비재현은 골격 교란·프로토콜. 남은 것은 물 제거·강체 수용체·단일 배좌·holo 편향·채점 함수 자체다.</a:t>
             </a:r>
           </a:p>
           <a:p>
@@ -6860,7 +7763,7 @@
                 </a:solidFill>
                 <a:latin typeface="Pretendard"/>
               </a:rPr>
-              <a:t> 다만 본 연구에서 그 통제가 바꾼 몫은 거의 0 이었다는 사실도 함께 적어야 정직하다.</a:t>
+              <a:t> 다만 여기서 그 통제가 바꾼 몫은 거의 0 이었다.</a:t>
             </a:r>
           </a:p>
           <a:p>
@@ -6888,11 +7791,36 @@
               <a:t> 그 비율 없이 상관값만 보면 무엇을 측정했는지 알 수 없다.</a:t>
             </a:r>
           </a:p>
-        </p:txBody>
-      </p:sp>
-      <p:sp>
-        <p:nvSpPr>
-          <p:cNvPr id="90" name="Rectangle 89"/>
+          <a:p>
+            <a:pPr algn="l">
+              <a:spcAft>
+                <a:spcPts val="600"/>
+              </a:spcAft>
+            </a:pPr>
+            <a:r>
+              <a:rPr sz="2700" b="1">
+                <a:solidFill>
+                  <a:srgbClr val="0B2A4A"/>
+                </a:solidFill>
+                <a:latin typeface="Pretendard"/>
+              </a:rPr>
+              <a:t>· “신호 없음” 은 귀무를 채택한 것이 아니다.</a:t>
+            </a:r>
+            <a:r>
+              <a:rPr sz="2500" b="0">
+                <a:solidFill>
+                  <a:srgbClr val="1A1A1A"/>
+                </a:solidFill>
+                <a:latin typeface="Pretendard"/>
+              </a:rPr>
+              <a:t> 신뢰구간 상한이 +0.08 이므로 |ρ| ≲ 0.23 인 관계는 배제하지 못한다. 기각하지 못한 것이지 없다고 보인 것이 아니다.</a:t>
+            </a:r>
+          </a:p>
+        </p:txBody>
+      </p:sp>
+      <p:sp>
+        <p:nvSpPr>
+          <p:cNvPr id="111" name="Rectangle 110"/>
           <p:cNvSpPr/>
           <p:nvPr/>
         </p:nvSpPr>
@@ -6936,7 +7864,7 @@
       </p:sp>
       <p:sp>
         <p:nvSpPr>
-          <p:cNvPr id="91" name="TextBox 90"/>
+          <p:cNvPr id="112" name="TextBox 111"/>
           <p:cNvSpPr txBox="1"/>
           <p:nvPr/>
         </p:nvSpPr>
@@ -6975,7 +7903,7 @@
       </p:sp>
       <p:sp>
         <p:nvSpPr>
-          <p:cNvPr id="92" name="TextBox 91"/>
+          <p:cNvPr id="113" name="TextBox 112"/>
           <p:cNvSpPr txBox="1"/>
           <p:nvPr/>
         </p:nvSpPr>

--- a/20260905/pde5_harness/sample_run/report/docs/poster_A0.pptx
+++ b/20260905/pde5_harness/sample_run/report/docs/poster_A0.pptx
@@ -3472,8 +3472,8 @@
         </p:blipFill>
         <p:spPr>
           <a:xfrm>
-            <a:off x="1080000" y="7632000"/>
-            <a:ext cx="28116000" cy="9926568"/>
+            <a:off x="3188699" y="7632000"/>
+            <a:ext cx="23898600" cy="10300031"/>
           </a:xfrm>
           <a:prstGeom prst="rect">
             <a:avLst/>
@@ -3488,7 +3488,7 @@
         </p:nvSpPr>
         <p:spPr>
           <a:xfrm>
-            <a:off x="1080000" y="17810568"/>
+            <a:off x="1080000" y="18184031"/>
             <a:ext cx="8844000" cy="612000"/>
           </a:xfrm>
           <a:prstGeom prst="rect">
@@ -3532,7 +3532,7 @@
         </p:nvSpPr>
         <p:spPr>
           <a:xfrm>
-            <a:off x="1260000" y="17864568"/>
+            <a:off x="1260000" y="18238031"/>
             <a:ext cx="648000" cy="504000"/>
           </a:xfrm>
           <a:prstGeom prst="rect">
@@ -3571,7 +3571,7 @@
         </p:nvSpPr>
         <p:spPr>
           <a:xfrm>
-            <a:off x="2016000" y="17864568"/>
+            <a:off x="2016000" y="18238031"/>
             <a:ext cx="7764000" cy="504000"/>
           </a:xfrm>
           <a:prstGeom prst="rect">
@@ -3610,7 +3610,7 @@
         </p:nvSpPr>
         <p:spPr>
           <a:xfrm>
-            <a:off x="1080000" y="18638568"/>
+            <a:off x="1080000" y="19012031"/>
             <a:ext cx="8844000" cy="4320417"/>
           </a:xfrm>
           <a:prstGeom prst="rect">
@@ -3681,7 +3681,7 @@
         </p:nvSpPr>
         <p:spPr>
           <a:xfrm>
-            <a:off x="1080000" y="23174985"/>
+            <a:off x="1080000" y="23548448"/>
             <a:ext cx="8844000" cy="3517391"/>
           </a:xfrm>
           <a:prstGeom prst="roundRect">
@@ -3727,7 +3727,7 @@
         </p:nvSpPr>
         <p:spPr>
           <a:xfrm>
-            <a:off x="1296000" y="23390985"/>
+            <a:off x="1296000" y="23764448"/>
             <a:ext cx="8412000" cy="3085391"/>
           </a:xfrm>
           <a:prstGeom prst="rect">
@@ -3866,7 +3866,7 @@
         </p:nvSpPr>
         <p:spPr>
           <a:xfrm>
-            <a:off x="1080000" y="26908377"/>
+            <a:off x="1080000" y="27281840"/>
             <a:ext cx="8844000" cy="612000"/>
           </a:xfrm>
           <a:prstGeom prst="rect">
@@ -3910,7 +3910,7 @@
         </p:nvSpPr>
         <p:spPr>
           <a:xfrm>
-            <a:off x="1260000" y="26962377"/>
+            <a:off x="1260000" y="27335840"/>
             <a:ext cx="648000" cy="504000"/>
           </a:xfrm>
           <a:prstGeom prst="rect">
@@ -3949,7 +3949,7 @@
         </p:nvSpPr>
         <p:spPr>
           <a:xfrm>
-            <a:off x="2016000" y="26962377"/>
+            <a:off x="2016000" y="27335840"/>
             <a:ext cx="7764000" cy="504000"/>
           </a:xfrm>
           <a:prstGeom prst="rect">
@@ -3996,7 +3996,7 @@
         </p:blipFill>
         <p:spPr>
           <a:xfrm>
-            <a:off x="1080000" y="27736377"/>
+            <a:off x="1080000" y="28109840"/>
             <a:ext cx="8844000" cy="2767440"/>
           </a:xfrm>
           <a:prstGeom prst="rect">
@@ -4012,7 +4012,7 @@
         </p:nvSpPr>
         <p:spPr>
           <a:xfrm>
-            <a:off x="1080000" y="30683817"/>
+            <a:off x="1080000" y="31057280"/>
             <a:ext cx="8844000" cy="2427998"/>
           </a:xfrm>
           <a:prstGeom prst="rect">
@@ -4067,7 +4067,7 @@
         </p:nvSpPr>
         <p:spPr>
           <a:xfrm>
-            <a:off x="1080000" y="33327815"/>
+            <a:off x="1080000" y="33701278"/>
             <a:ext cx="8844000" cy="2446033"/>
           </a:xfrm>
           <a:prstGeom prst="rect">
@@ -4122,7 +4122,7 @@
         </p:nvSpPr>
         <p:spPr>
           <a:xfrm>
-            <a:off x="1080000" y="35773849"/>
+            <a:off x="1080000" y="36147312"/>
             <a:ext cx="8844000" cy="612000"/>
           </a:xfrm>
           <a:prstGeom prst="rect">
@@ -4166,7 +4166,7 @@
         </p:nvSpPr>
         <p:spPr>
           <a:xfrm>
-            <a:off x="1260000" y="35827849"/>
+            <a:off x="1260000" y="36201312"/>
             <a:ext cx="648000" cy="504000"/>
           </a:xfrm>
           <a:prstGeom prst="rect">
@@ -4205,7 +4205,7 @@
         </p:nvSpPr>
         <p:spPr>
           <a:xfrm>
-            <a:off x="2016000" y="35827849"/>
+            <a:off x="2016000" y="36201312"/>
             <a:ext cx="7764000" cy="504000"/>
           </a:xfrm>
           <a:prstGeom prst="rect">
@@ -4244,7 +4244,7 @@
         </p:nvSpPr>
         <p:spPr>
           <a:xfrm>
-            <a:off x="1080000" y="36601849"/>
+            <a:off x="1080000" y="36975312"/>
             <a:ext cx="8844000" cy="576000"/>
           </a:xfrm>
           <a:prstGeom prst="rect">
@@ -4288,7 +4288,7 @@
         </p:nvSpPr>
         <p:spPr>
           <a:xfrm>
-            <a:off x="1260000" y="36637849"/>
+            <a:off x="1260000" y="37011312"/>
             <a:ext cx="6190799" cy="504000"/>
           </a:xfrm>
           <a:prstGeom prst="rect">
@@ -4327,7 +4327,7 @@
         </p:nvSpPr>
         <p:spPr>
           <a:xfrm>
-            <a:off x="7270799" y="36637849"/>
+            <a:off x="7270799" y="37011312"/>
             <a:ext cx="2473200" cy="504000"/>
           </a:xfrm>
           <a:prstGeom prst="rect">
@@ -4366,7 +4366,7 @@
         </p:nvSpPr>
         <p:spPr>
           <a:xfrm>
-            <a:off x="1080000" y="37177849"/>
+            <a:off x="1080000" y="37551312"/>
             <a:ext cx="8844000" cy="576000"/>
           </a:xfrm>
           <a:prstGeom prst="rect">
@@ -4410,7 +4410,7 @@
         </p:nvSpPr>
         <p:spPr>
           <a:xfrm>
-            <a:off x="1260000" y="37213849"/>
+            <a:off x="1260000" y="37587312"/>
             <a:ext cx="6190799" cy="504000"/>
           </a:xfrm>
           <a:prstGeom prst="rect">
@@ -4449,7 +4449,7 @@
         </p:nvSpPr>
         <p:spPr>
           <a:xfrm>
-            <a:off x="7270799" y="37213849"/>
+            <a:off x="7270799" y="37587312"/>
             <a:ext cx="2473200" cy="504000"/>
           </a:xfrm>
           <a:prstGeom prst="rect">
@@ -4488,7 +4488,7 @@
         </p:nvSpPr>
         <p:spPr>
           <a:xfrm>
-            <a:off x="1080000" y="37753849"/>
+            <a:off x="1080000" y="38127312"/>
             <a:ext cx="8844000" cy="576000"/>
           </a:xfrm>
           <a:prstGeom prst="rect">
@@ -4532,7 +4532,7 @@
         </p:nvSpPr>
         <p:spPr>
           <a:xfrm>
-            <a:off x="1260000" y="37789849"/>
+            <a:off x="1260000" y="38163312"/>
             <a:ext cx="6190799" cy="504000"/>
           </a:xfrm>
           <a:prstGeom prst="rect">
@@ -4571,7 +4571,7 @@
         </p:nvSpPr>
         <p:spPr>
           <a:xfrm>
-            <a:off x="7270799" y="37789849"/>
+            <a:off x="7270799" y="38163312"/>
             <a:ext cx="2473200" cy="504000"/>
           </a:xfrm>
           <a:prstGeom prst="rect">
@@ -4610,7 +4610,7 @@
         </p:nvSpPr>
         <p:spPr>
           <a:xfrm>
-            <a:off x="1080000" y="38329849"/>
+            <a:off x="1080000" y="38703312"/>
             <a:ext cx="8844000" cy="576000"/>
           </a:xfrm>
           <a:prstGeom prst="rect">
@@ -4654,7 +4654,7 @@
         </p:nvSpPr>
         <p:spPr>
           <a:xfrm>
-            <a:off x="1260000" y="38365849"/>
+            <a:off x="1260000" y="38739312"/>
             <a:ext cx="6190799" cy="504000"/>
           </a:xfrm>
           <a:prstGeom prst="rect">
@@ -4693,7 +4693,7 @@
         </p:nvSpPr>
         <p:spPr>
           <a:xfrm>
-            <a:off x="7270799" y="38365849"/>
+            <a:off x="7270799" y="38739312"/>
             <a:ext cx="2473200" cy="504000"/>
           </a:xfrm>
           <a:prstGeom prst="rect">
@@ -4732,7 +4732,7 @@
         </p:nvSpPr>
         <p:spPr>
           <a:xfrm>
-            <a:off x="1080000" y="38905849"/>
+            <a:off x="1080000" y="39279312"/>
             <a:ext cx="8844000" cy="576000"/>
           </a:xfrm>
           <a:prstGeom prst="rect">
@@ -4776,7 +4776,7 @@
         </p:nvSpPr>
         <p:spPr>
           <a:xfrm>
-            <a:off x="1260000" y="38941849"/>
+            <a:off x="1260000" y="39315312"/>
             <a:ext cx="6190799" cy="504000"/>
           </a:xfrm>
           <a:prstGeom prst="rect">
@@ -4815,7 +4815,7 @@
         </p:nvSpPr>
         <p:spPr>
           <a:xfrm>
-            <a:off x="7270799" y="38941849"/>
+            <a:off x="7270799" y="39315312"/>
             <a:ext cx="2473200" cy="504000"/>
           </a:xfrm>
           <a:prstGeom prst="rect">
@@ -4854,7 +4854,7 @@
         </p:nvSpPr>
         <p:spPr>
           <a:xfrm>
-            <a:off x="1080000" y="39697849"/>
+            <a:off x="1080000" y="40071312"/>
             <a:ext cx="8844000" cy="829475"/>
           </a:xfrm>
           <a:prstGeom prst="rect">
@@ -4893,7 +4893,7 @@
         </p:nvSpPr>
         <p:spPr>
           <a:xfrm>
-            <a:off x="10715999" y="17810568"/>
+            <a:off x="10715999" y="18184031"/>
             <a:ext cx="8844000" cy="612000"/>
           </a:xfrm>
           <a:prstGeom prst="rect">
@@ -4937,7 +4937,7 @@
         </p:nvSpPr>
         <p:spPr>
           <a:xfrm>
-            <a:off x="10895999" y="17864568"/>
+            <a:off x="10895999" y="18238031"/>
             <a:ext cx="648000" cy="504000"/>
           </a:xfrm>
           <a:prstGeom prst="rect">
@@ -4976,7 +4976,7 @@
         </p:nvSpPr>
         <p:spPr>
           <a:xfrm>
-            <a:off x="11651999" y="17864568"/>
+            <a:off x="11651999" y="18238031"/>
             <a:ext cx="7764000" cy="504000"/>
           </a:xfrm>
           <a:prstGeom prst="rect">
@@ -5023,7 +5023,7 @@
         </p:blipFill>
         <p:spPr>
           <a:xfrm>
-            <a:off x="10715999" y="18638568"/>
+            <a:off x="10715999" y="19012031"/>
             <a:ext cx="8844000" cy="4330725"/>
           </a:xfrm>
           <a:prstGeom prst="rect">
@@ -5039,7 +5039,7 @@
         </p:nvSpPr>
         <p:spPr>
           <a:xfrm>
-            <a:off x="10715999" y="23149293"/>
+            <a:off x="10715999" y="23522756"/>
             <a:ext cx="8844000" cy="576000"/>
           </a:xfrm>
           <a:prstGeom prst="rect">
@@ -5083,7 +5083,7 @@
         </p:nvSpPr>
         <p:spPr>
           <a:xfrm>
-            <a:off x="10895999" y="23185293"/>
+            <a:off x="10895999" y="23558756"/>
             <a:ext cx="4422000" cy="504000"/>
           </a:xfrm>
           <a:prstGeom prst="rect">
@@ -5122,7 +5122,7 @@
         </p:nvSpPr>
         <p:spPr>
           <a:xfrm>
-            <a:off x="15137999" y="23185293"/>
+            <a:off x="15137999" y="23558756"/>
             <a:ext cx="4242000" cy="504000"/>
           </a:xfrm>
           <a:prstGeom prst="rect">
@@ -5161,7 +5161,7 @@
         </p:nvSpPr>
         <p:spPr>
           <a:xfrm>
-            <a:off x="10715999" y="23725293"/>
+            <a:off x="10715999" y="24098756"/>
             <a:ext cx="8844000" cy="576000"/>
           </a:xfrm>
           <a:prstGeom prst="rect">
@@ -5205,7 +5205,7 @@
         </p:nvSpPr>
         <p:spPr>
           <a:xfrm>
-            <a:off x="10895999" y="23761293"/>
+            <a:off x="10895999" y="24134756"/>
             <a:ext cx="4422000" cy="504000"/>
           </a:xfrm>
           <a:prstGeom prst="rect">
@@ -5244,7 +5244,7 @@
         </p:nvSpPr>
         <p:spPr>
           <a:xfrm>
-            <a:off x="15137999" y="23761293"/>
+            <a:off x="15137999" y="24134756"/>
             <a:ext cx="4242000" cy="504000"/>
           </a:xfrm>
           <a:prstGeom prst="rect">
@@ -5283,7 +5283,7 @@
         </p:nvSpPr>
         <p:spPr>
           <a:xfrm>
-            <a:off x="10715999" y="24517293"/>
+            <a:off x="10715999" y="24890756"/>
             <a:ext cx="8844000" cy="973756"/>
           </a:xfrm>
           <a:prstGeom prst="rect">
@@ -5322,7 +5322,7 @@
         </p:nvSpPr>
         <p:spPr>
           <a:xfrm>
-            <a:off x="10715999" y="25707049"/>
+            <a:off x="10715999" y="26080512"/>
             <a:ext cx="8844000" cy="612000"/>
           </a:xfrm>
           <a:prstGeom prst="rect">
@@ -5366,7 +5366,7 @@
         </p:nvSpPr>
         <p:spPr>
           <a:xfrm>
-            <a:off x="10895999" y="25761049"/>
+            <a:off x="10895999" y="26134512"/>
             <a:ext cx="648000" cy="504000"/>
           </a:xfrm>
           <a:prstGeom prst="rect">
@@ -5405,7 +5405,7 @@
         </p:nvSpPr>
         <p:spPr>
           <a:xfrm>
-            <a:off x="11651999" y="25761049"/>
+            <a:off x="11651999" y="26134512"/>
             <a:ext cx="7764000" cy="504000"/>
           </a:xfrm>
           <a:prstGeom prst="rect">
@@ -5444,7 +5444,7 @@
         </p:nvSpPr>
         <p:spPr>
           <a:xfrm>
-            <a:off x="10715999" y="26535049"/>
+            <a:off x="10715999" y="26908512"/>
             <a:ext cx="8844000" cy="576000"/>
           </a:xfrm>
           <a:prstGeom prst="rect">
@@ -5488,7 +5488,7 @@
         </p:nvSpPr>
         <p:spPr>
           <a:xfrm>
-            <a:off x="10895999" y="26571049"/>
+            <a:off x="10895999" y="26944512"/>
             <a:ext cx="5306399" cy="504000"/>
           </a:xfrm>
           <a:prstGeom prst="rect">
@@ -5527,7 +5527,7 @@
         </p:nvSpPr>
         <p:spPr>
           <a:xfrm>
-            <a:off x="16022399" y="26571049"/>
+            <a:off x="16022399" y="26944512"/>
             <a:ext cx="3357600" cy="504000"/>
           </a:xfrm>
           <a:prstGeom prst="rect">
@@ -5566,7 +5566,7 @@
         </p:nvSpPr>
         <p:spPr>
           <a:xfrm>
-            <a:off x="10715999" y="27111049"/>
+            <a:off x="10715999" y="27484512"/>
             <a:ext cx="8844000" cy="576000"/>
           </a:xfrm>
           <a:prstGeom prst="rect">
@@ -5610,7 +5610,7 @@
         </p:nvSpPr>
         <p:spPr>
           <a:xfrm>
-            <a:off x="10895999" y="27147049"/>
+            <a:off x="10895999" y="27520512"/>
             <a:ext cx="5306399" cy="504000"/>
           </a:xfrm>
           <a:prstGeom prst="rect">
@@ -5649,7 +5649,7 @@
         </p:nvSpPr>
         <p:spPr>
           <a:xfrm>
-            <a:off x="16022399" y="27147049"/>
+            <a:off x="16022399" y="27520512"/>
             <a:ext cx="3357600" cy="504000"/>
           </a:xfrm>
           <a:prstGeom prst="rect">
@@ -5688,7 +5688,7 @@
         </p:nvSpPr>
         <p:spPr>
           <a:xfrm>
-            <a:off x="10715999" y="27903049"/>
+            <a:off x="10715999" y="28276512"/>
             <a:ext cx="8844000" cy="1424635"/>
           </a:xfrm>
           <a:prstGeom prst="rect">
@@ -5753,7 +5753,7 @@
         </p:blipFill>
         <p:spPr>
           <a:xfrm>
-            <a:off x="10715999" y="29543685"/>
+            <a:off x="10715999" y="29917148"/>
             <a:ext cx="8844000" cy="3239388"/>
           </a:xfrm>
           <a:prstGeom prst="rect">
@@ -5769,7 +5769,7 @@
         </p:nvSpPr>
         <p:spPr>
           <a:xfrm>
-            <a:off x="10715999" y="32963073"/>
+            <a:off x="10715999" y="33336536"/>
             <a:ext cx="8844000" cy="612000"/>
           </a:xfrm>
           <a:prstGeom prst="rect">
@@ -5813,7 +5813,7 @@
         </p:nvSpPr>
         <p:spPr>
           <a:xfrm>
-            <a:off x="10895999" y="33017073"/>
+            <a:off x="10895999" y="33390536"/>
             <a:ext cx="648000" cy="504000"/>
           </a:xfrm>
           <a:prstGeom prst="rect">
@@ -5852,7 +5852,7 @@
         </p:nvSpPr>
         <p:spPr>
           <a:xfrm>
-            <a:off x="11651999" y="33017073"/>
+            <a:off x="11651999" y="33390536"/>
             <a:ext cx="7764000" cy="504000"/>
           </a:xfrm>
           <a:prstGeom prst="rect">
@@ -5891,7 +5891,7 @@
         </p:nvSpPr>
         <p:spPr>
           <a:xfrm>
-            <a:off x="10715999" y="33791073"/>
+            <a:off x="10715999" y="34164536"/>
             <a:ext cx="8844000" cy="576000"/>
           </a:xfrm>
           <a:prstGeom prst="rect">
@@ -5935,7 +5935,7 @@
         </p:nvSpPr>
         <p:spPr>
           <a:xfrm>
-            <a:off x="10895999" y="33827073"/>
+            <a:off x="10895999" y="34200536"/>
             <a:ext cx="5483280" cy="504000"/>
           </a:xfrm>
           <a:prstGeom prst="rect">
@@ -5974,7 +5974,7 @@
         </p:nvSpPr>
         <p:spPr>
           <a:xfrm>
-            <a:off x="16199279" y="33827073"/>
+            <a:off x="16199279" y="34200536"/>
             <a:ext cx="3180719" cy="504000"/>
           </a:xfrm>
           <a:prstGeom prst="rect">
@@ -6013,7 +6013,7 @@
         </p:nvSpPr>
         <p:spPr>
           <a:xfrm>
-            <a:off x="10715999" y="34367073"/>
+            <a:off x="10715999" y="34740536"/>
             <a:ext cx="8844000" cy="576000"/>
           </a:xfrm>
           <a:prstGeom prst="rect">
@@ -6057,7 +6057,7 @@
         </p:nvSpPr>
         <p:spPr>
           <a:xfrm>
-            <a:off x="10895999" y="34403073"/>
+            <a:off x="10895999" y="34776536"/>
             <a:ext cx="5483280" cy="504000"/>
           </a:xfrm>
           <a:prstGeom prst="rect">
@@ -6096,7 +6096,7 @@
         </p:nvSpPr>
         <p:spPr>
           <a:xfrm>
-            <a:off x="16199279" y="34403073"/>
+            <a:off x="16199279" y="34776536"/>
             <a:ext cx="3180719" cy="504000"/>
           </a:xfrm>
           <a:prstGeom prst="rect">
@@ -6135,7 +6135,7 @@
         </p:nvSpPr>
         <p:spPr>
           <a:xfrm>
-            <a:off x="10715999" y="35159073"/>
+            <a:off x="10715999" y="35532536"/>
             <a:ext cx="8844000" cy="1424635"/>
           </a:xfrm>
           <a:prstGeom prst="rect">
@@ -6210,7 +6210,7 @@
         </p:nvSpPr>
         <p:spPr>
           <a:xfrm>
-            <a:off x="20351999" y="17810568"/>
+            <a:off x="20351999" y="18184031"/>
             <a:ext cx="8844000" cy="612000"/>
           </a:xfrm>
           <a:prstGeom prst="rect">
@@ -6254,7 +6254,7 @@
         </p:nvSpPr>
         <p:spPr>
           <a:xfrm>
-            <a:off x="20531999" y="17864568"/>
+            <a:off x="20531999" y="18238031"/>
             <a:ext cx="648000" cy="504000"/>
           </a:xfrm>
           <a:prstGeom prst="rect">
@@ -6293,7 +6293,7 @@
         </p:nvSpPr>
         <p:spPr>
           <a:xfrm>
-            <a:off x="21287999" y="17864568"/>
+            <a:off x="21287999" y="18238031"/>
             <a:ext cx="7764000" cy="504000"/>
           </a:xfrm>
           <a:prstGeom prst="rect">
@@ -6340,8 +6340,8 @@
         </p:blipFill>
         <p:spPr>
           <a:xfrm>
-            <a:off x="20794199" y="18638568"/>
-            <a:ext cx="7959600" cy="4367365"/>
+            <a:off x="21059519" y="19012031"/>
+            <a:ext cx="7428959" cy="4076207"/>
           </a:xfrm>
           <a:prstGeom prst="rect">
             <a:avLst/>
@@ -6356,7 +6356,7 @@
         </p:nvSpPr>
         <p:spPr>
           <a:xfrm>
-            <a:off x="20351999" y="23185933"/>
+            <a:off x="20351999" y="23268238"/>
             <a:ext cx="8844000" cy="576000"/>
           </a:xfrm>
           <a:prstGeom prst="rect">
@@ -6400,7 +6400,7 @@
         </p:nvSpPr>
         <p:spPr>
           <a:xfrm>
-            <a:off x="20531999" y="23221933"/>
+            <a:off x="20531999" y="23304238"/>
             <a:ext cx="5129519" cy="504000"/>
           </a:xfrm>
           <a:prstGeom prst="rect">
@@ -6439,7 +6439,7 @@
         </p:nvSpPr>
         <p:spPr>
           <a:xfrm>
-            <a:off x="25481519" y="23221933"/>
+            <a:off x="25481519" y="23304238"/>
             <a:ext cx="3534480" cy="504000"/>
           </a:xfrm>
           <a:prstGeom prst="rect">
@@ -6478,7 +6478,7 @@
         </p:nvSpPr>
         <p:spPr>
           <a:xfrm>
-            <a:off x="20351999" y="23761933"/>
+            <a:off x="20351999" y="23844238"/>
             <a:ext cx="8844000" cy="576000"/>
           </a:xfrm>
           <a:prstGeom prst="rect">
@@ -6522,7 +6522,7 @@
         </p:nvSpPr>
         <p:spPr>
           <a:xfrm>
-            <a:off x="20531999" y="23797933"/>
+            <a:off x="20531999" y="23880238"/>
             <a:ext cx="5129519" cy="504000"/>
           </a:xfrm>
           <a:prstGeom prst="rect">
@@ -6561,7 +6561,7 @@
         </p:nvSpPr>
         <p:spPr>
           <a:xfrm>
-            <a:off x="25481519" y="23797933"/>
+            <a:off x="25481519" y="23880238"/>
             <a:ext cx="3534480" cy="504000"/>
           </a:xfrm>
           <a:prstGeom prst="rect">
@@ -6600,7 +6600,7 @@
         </p:nvSpPr>
         <p:spPr>
           <a:xfrm>
-            <a:off x="20351999" y="24337933"/>
+            <a:off x="20351999" y="24420238"/>
             <a:ext cx="8844000" cy="576000"/>
           </a:xfrm>
           <a:prstGeom prst="rect">
@@ -6644,7 +6644,7 @@
         </p:nvSpPr>
         <p:spPr>
           <a:xfrm>
-            <a:off x="20531999" y="24373933"/>
+            <a:off x="20531999" y="24456238"/>
             <a:ext cx="5129519" cy="504000"/>
           </a:xfrm>
           <a:prstGeom prst="rect">
@@ -6683,7 +6683,7 @@
         </p:nvSpPr>
         <p:spPr>
           <a:xfrm>
-            <a:off x="25481519" y="24373933"/>
+            <a:off x="25481519" y="24456238"/>
             <a:ext cx="3534480" cy="504000"/>
           </a:xfrm>
           <a:prstGeom prst="rect">
@@ -6722,7 +6722,7 @@
         </p:nvSpPr>
         <p:spPr>
           <a:xfrm>
-            <a:off x="20351999" y="24913933"/>
+            <a:off x="20351999" y="24996238"/>
             <a:ext cx="8844000" cy="576000"/>
           </a:xfrm>
           <a:prstGeom prst="rect">
@@ -6766,7 +6766,7 @@
         </p:nvSpPr>
         <p:spPr>
           <a:xfrm>
-            <a:off x="20531999" y="24949933"/>
+            <a:off x="20531999" y="25032238"/>
             <a:ext cx="5129519" cy="504000"/>
           </a:xfrm>
           <a:prstGeom prst="rect">
@@ -6805,7 +6805,7 @@
         </p:nvSpPr>
         <p:spPr>
           <a:xfrm>
-            <a:off x="25481519" y="24949933"/>
+            <a:off x="25481519" y="25032238"/>
             <a:ext cx="3534480" cy="504000"/>
           </a:xfrm>
           <a:prstGeom prst="rect">
@@ -6844,8 +6844,8 @@
         </p:nvSpPr>
         <p:spPr>
           <a:xfrm>
-            <a:off x="20351999" y="25705933"/>
-            <a:ext cx="8844000" cy="973756"/>
+            <a:off x="20351999" y="25788238"/>
+            <a:ext cx="8844000" cy="522878"/>
           </a:xfrm>
           <a:prstGeom prst="rect">
             <a:avLst/>
@@ -6870,7 +6870,7 @@
                 </a:solidFill>
                 <a:latin typeface="Pretendard"/>
               </a:rPr>
-              <a:t>위 넷은 모두 상관·Q² 값이다. </a:t>
+              <a:t>위 넷은 상관·Q² 값이다. </a:t>
             </a:r>
             <a:r>
               <a:rPr sz="2500" b="1">
@@ -6879,7 +6879,7 @@
                 </a:solidFill>
                 <a:latin typeface="Pretendard"/>
               </a:rPr>
-              <a:t>순열 검정 p = 0.31878</a:t>
+              <a:t>순열 p = 0.31878</a:t>
             </a:r>
             <a:r>
               <a:rPr sz="2100" b="0">
@@ -6901,7 +6901,7 @@
         </p:nvSpPr>
         <p:spPr>
           <a:xfrm>
-            <a:off x="20351999" y="26823689"/>
+            <a:off x="20351999" y="26419116"/>
             <a:ext cx="8844000" cy="1424635"/>
           </a:xfrm>
           <a:prstGeom prst="rect">
@@ -6958,7 +6958,7 @@
         </p:nvSpPr>
         <p:spPr>
           <a:xfrm>
-            <a:off x="20351999" y="28392325"/>
+            <a:off x="20351999" y="27987751"/>
             <a:ext cx="8844000" cy="612000"/>
           </a:xfrm>
           <a:prstGeom prst="rect">
@@ -7002,7 +7002,7 @@
         </p:nvSpPr>
         <p:spPr>
           <a:xfrm>
-            <a:off x="20531999" y="28446325"/>
+            <a:off x="20531999" y="28041751"/>
             <a:ext cx="648000" cy="504000"/>
           </a:xfrm>
           <a:prstGeom prst="rect">
@@ -7041,7 +7041,7 @@
         </p:nvSpPr>
         <p:spPr>
           <a:xfrm>
-            <a:off x="21287999" y="28446325"/>
+            <a:off x="21287999" y="28041751"/>
             <a:ext cx="7764000" cy="504000"/>
           </a:xfrm>
           <a:prstGeom prst="rect">
@@ -7080,7 +7080,7 @@
         </p:nvSpPr>
         <p:spPr>
           <a:xfrm>
-            <a:off x="20351999" y="29220325"/>
+            <a:off x="20351999" y="28815751"/>
             <a:ext cx="8844000" cy="576000"/>
           </a:xfrm>
           <a:prstGeom prst="rect">
@@ -7124,7 +7124,7 @@
         </p:nvSpPr>
         <p:spPr>
           <a:xfrm>
-            <a:off x="20531999" y="29256325"/>
+            <a:off x="20531999" y="28851751"/>
             <a:ext cx="5483280" cy="504000"/>
           </a:xfrm>
           <a:prstGeom prst="rect">
@@ -7163,7 +7163,7 @@
         </p:nvSpPr>
         <p:spPr>
           <a:xfrm>
-            <a:off x="25835279" y="29256325"/>
+            <a:off x="25835279" y="28851751"/>
             <a:ext cx="3180719" cy="504000"/>
           </a:xfrm>
           <a:prstGeom prst="rect">
@@ -7189,7 +7189,7 @@
                 </a:solidFill>
                 <a:latin typeface="Pretendard"/>
               </a:rPr>
-              <a:t>4.50 Å</a:t>
+              <a:t>3.79 Å</a:t>
             </a:r>
           </a:p>
         </p:txBody>
@@ -7202,7 +7202,7 @@
         </p:nvSpPr>
         <p:spPr>
           <a:xfrm>
-            <a:off x="20351999" y="29796325"/>
+            <a:off x="20351999" y="29391751"/>
             <a:ext cx="8844000" cy="576000"/>
           </a:xfrm>
           <a:prstGeom prst="rect">
@@ -7246,7 +7246,7 @@
         </p:nvSpPr>
         <p:spPr>
           <a:xfrm>
-            <a:off x="20531999" y="29832325"/>
+            <a:off x="20531999" y="29427751"/>
             <a:ext cx="5483280" cy="504000"/>
           </a:xfrm>
           <a:prstGeom prst="rect">
@@ -7272,7 +7272,7 @@
                 </a:solidFill>
                 <a:latin typeface="Pretendard"/>
               </a:rPr>
-              <a:t>2 Å 기준 통과 (전체)</a:t>
+              <a:t>2 Å 기준 통과</a:t>
             </a:r>
           </a:p>
         </p:txBody>
@@ -7285,7 +7285,7 @@
         </p:nvSpPr>
         <p:spPr>
           <a:xfrm>
-            <a:off x="25835279" y="29832325"/>
+            <a:off x="25835279" y="29427751"/>
             <a:ext cx="3180719" cy="504000"/>
           </a:xfrm>
           <a:prstGeom prst="rect">
@@ -7311,7 +7311,7 @@
                 </a:solidFill>
                 <a:latin typeface="Pretendard"/>
               </a:rPr>
-              <a:t>19.0%</a:t>
+              <a:t>28.2%</a:t>
             </a:r>
           </a:p>
         </p:txBody>
@@ -7324,7 +7324,7 @@
         </p:nvSpPr>
         <p:spPr>
           <a:xfrm>
-            <a:off x="20351999" y="30372325"/>
+            <a:off x="20351999" y="29967751"/>
             <a:ext cx="8844000" cy="576000"/>
           </a:xfrm>
           <a:prstGeom prst="rect">
@@ -7368,7 +7368,7 @@
         </p:nvSpPr>
         <p:spPr>
           <a:xfrm>
-            <a:off x="20531999" y="30408325"/>
+            <a:off x="20531999" y="30003751"/>
             <a:ext cx="5483280" cy="504000"/>
           </a:xfrm>
           <a:prstGeom prst="rect">
@@ -7394,7 +7394,7 @@
                 </a:solidFill>
                 <a:latin typeface="Pretendard"/>
               </a:rPr>
-              <a:t>far 대역 통과율</a:t>
+              <a:t>대상</a:t>
             </a:r>
           </a:p>
         </p:txBody>
@@ -7407,7 +7407,7 @@
         </p:nvSpPr>
         <p:spPr>
           <a:xfrm>
-            <a:off x="25835279" y="30408325"/>
+            <a:off x="25835279" y="30003751"/>
             <a:ext cx="3180719" cy="504000"/>
           </a:xfrm>
           <a:prstGeom prst="rect">
@@ -7429,11 +7429,11 @@
             <a:r>
               <a:rPr sz="2900" b="1">
                 <a:solidFill>
-                  <a:srgbClr val="D55E00"/>
-                </a:solidFill>
-                <a:latin typeface="Pretendard"/>
-              </a:rPr>
-              <a:t>1.8%</a:t>
+                  <a:srgbClr val="5A636B"/>
+                </a:solidFill>
+                <a:latin typeface="Pretendard"/>
+              </a:rPr>
+              <a:t>해석 가능 대역 103건</a:t>
             </a:r>
           </a:p>
         </p:txBody>
@@ -7446,8 +7446,8 @@
         </p:nvSpPr>
         <p:spPr>
           <a:xfrm>
-            <a:off x="20351999" y="31164325"/>
-            <a:ext cx="8844000" cy="973756"/>
+            <a:off x="20351999" y="30759751"/>
+            <a:ext cx="8844000" cy="1424635"/>
           </a:xfrm>
           <a:prstGeom prst="rect">
             <a:avLst/>
@@ -7472,7 +7472,16 @@
                 </a:solidFill>
                 <a:latin typeface="Pretendard"/>
               </a:rPr>
-              <a:t>점수를 매긴 자세의 81% 가 C2 를 실패시킨 것과 같은 기준 밖이다 — 이것이 모든 상관 해석의 상한이다.</a:t>
+              <a:t>점수를 매긴 자세의 72% 가 C2 를 실패시킨 것과 같은 기준 밖이다 — 이것이 모든 상관 해석의 상한이다. </a:t>
+            </a:r>
+            <a:r>
+              <a:rPr sz="2100" b="0">
+                <a:solidFill>
+                  <a:srgbClr val="5A636B"/>
+                </a:solidFill>
+                <a:latin typeface="Pretendard"/>
+              </a:rPr>
+              <a:t>far 대역은 공유 부분구조가 평균 10.6원자라 지표가 성립하지 않아 제외했다.</a:t>
             </a:r>
           </a:p>
         </p:txBody>
@@ -7485,7 +7494,7 @@
         </p:nvSpPr>
         <p:spPr>
           <a:xfrm>
-            <a:off x="20351999" y="32282081"/>
+            <a:off x="20351999" y="32292386"/>
             <a:ext cx="8844000" cy="612000"/>
           </a:xfrm>
           <a:prstGeom prst="rect">
@@ -7529,7 +7538,7 @@
         </p:nvSpPr>
         <p:spPr>
           <a:xfrm>
-            <a:off x="20531999" y="32336081"/>
+            <a:off x="20531999" y="32346386"/>
             <a:ext cx="648000" cy="504000"/>
           </a:xfrm>
           <a:prstGeom prst="rect">
@@ -7568,7 +7577,7 @@
         </p:nvSpPr>
         <p:spPr>
           <a:xfrm>
-            <a:off x="21287999" y="32336081"/>
+            <a:off x="21287999" y="32346386"/>
             <a:ext cx="7764000" cy="504000"/>
           </a:xfrm>
           <a:prstGeom prst="rect">
@@ -7607,7 +7616,7 @@
         </p:nvSpPr>
         <p:spPr>
           <a:xfrm>
-            <a:off x="20351999" y="33110081"/>
+            <a:off x="20351999" y="33120386"/>
             <a:ext cx="8844000" cy="7778510"/>
           </a:xfrm>
           <a:prstGeom prst="roundRect">
@@ -7653,7 +7662,7 @@
         </p:nvSpPr>
         <p:spPr>
           <a:xfrm>
-            <a:off x="20567999" y="33326081"/>
+            <a:off x="20567999" y="33336386"/>
             <a:ext cx="8412000" cy="7346510"/>
           </a:xfrm>
           <a:prstGeom prst="rect">
